--- a/CoExistShieldAI_AIBuildersCup2026_PitchDeck.pptx
+++ b/CoExistShieldAI_AIBuildersCup2026_PitchDeck.pptx
@@ -12,6 +12,8 @@
     <p:sldId id="257" r:id="rId7"/>
     <p:sldId id="258" r:id="rId8"/>
     <p:sldId id="259" r:id="rId9"/>
+    <p:sldId id="272" r:id="rId28"/>
+    <p:sldId id="273" r:id="rId29"/>
     <p:sldId id="260" r:id="rId10"/>
     <p:sldId id="261" r:id="rId11"/>
     <p:sldId id="262" r:id="rId12"/>
@@ -6998,12 +7000,12 @@
                 <a:spcPts val="0"/>
               </a:spcBef>
               <a:spcAft>
-                <a:spcPts val="1200"/>
-              </a:spcAft>
-              <a:buNone/>
-              <a:defRPr sz="2200" b="1">
-                <a:solidFill>
-                  <a:srgbClr val="8AB4F8"/>
+                <a:spcPts val="2000"/>
+              </a:spcAft>
+              <a:buNone/>
+              <a:defRPr sz="2800" b="1">
+                <a:solidFill>
+                  <a:srgbClr val="FFFFFF"/>
                 </a:solidFill>
                 <a:latin typeface="Google Sans Flex"/>
               </a:defRPr>
@@ -7021,76 +7023,126 @@
           <a:p>
             <a:pPr>
               <a:spcAft>
-                <a:spcPts val="700"/>
-              </a:spcAft>
-            </a:pPr>
-            <a:r>
-              <a:rPr sz="1250" b="1">
-                <a:solidFill>
-                  <a:srgbClr val="FFFFFF"/>
+                <a:spcPts val="1000"/>
+              </a:spcAft>
+            </a:pPr>
+            <a:r>
+              <a:rPr sz="1300" b="1">
+                <a:solidFill>
+                  <a:srgbClr val="8AB4F8"/>
                 </a:solidFill>
                 <a:latin typeface="Google Sans Flex"/>
               </a:rPr>
-              <a:t>Team name:  </a:t>
-            </a:r>
-            <a:r>
-              <a:rPr sz="1150">
-                <a:solidFill>
-                  <a:srgbClr val="BDC1C6"/>
+              <a:t>Team Name: </a:t>
+            </a:r>
+            <a:r>
+              <a:rPr sz="1300">
+                <a:solidFill>
+                  <a:srgbClr val="E8EAED"/>
                 </a:solidFill>
                 <a:latin typeface="Google Sans Flex"/>
               </a:rPr>
-              <a:t>CoExist Shield AI</a:t>
+              <a:t>CoExist Shield AI (CoralD)</a:t>
             </a:r>
           </a:p>
           <a:p>
             <a:pPr>
               <a:spcAft>
-                <a:spcPts val="700"/>
-              </a:spcAft>
-            </a:pPr>
-            <a:r>
-              <a:rPr sz="1250" b="1">
-                <a:solidFill>
-                  <a:srgbClr val="FFFFFF"/>
+                <a:spcPts val="1000"/>
+              </a:spcAft>
+            </a:pPr>
+            <a:r>
+              <a:rPr sz="1300" b="1">
+                <a:solidFill>
+                  <a:srgbClr val="8AB4F8"/>
                 </a:solidFill>
                 <a:latin typeface="Google Sans Flex"/>
               </a:rPr>
-              <a:t>Team leader name:  </a:t>
-            </a:r>
-            <a:r>
-              <a:rPr sz="1150">
-                <a:solidFill>
-                  <a:srgbClr val="BDC1C6"/>
+              <a:t>Track / Theme: </a:t>
+            </a:r>
+            <a:r>
+              <a:rPr sz="1300">
+                <a:solidFill>
+                  <a:srgbClr val="E8EAED"/>
                 </a:solidFill>
                 <a:latin typeface="Google Sans Flex"/>
               </a:rPr>
-              <a:t>Kat (Project Lead / Core Architect)</a:t>
+              <a:t>AI Builders Cup 2026 — Autonomous AI Agents for Global Coexistence</a:t>
             </a:r>
           </a:p>
           <a:p>
             <a:pPr>
               <a:spcAft>
-                <a:spcPts val="700"/>
-              </a:spcAft>
-            </a:pPr>
-            <a:r>
-              <a:rPr sz="1250" b="1">
-                <a:solidFill>
-                  <a:srgbClr val="FFFFFF"/>
+                <a:spcPts val="1000"/>
+              </a:spcAft>
+            </a:pPr>
+            <a:r>
+              <a:rPr sz="1300" b="1">
+                <a:solidFill>
+                  <a:srgbClr val="8AB4F8"/>
                 </a:solidFill>
                 <a:latin typeface="Google Sans Flex"/>
               </a:rPr>
-              <a:t>Problem Statement:  </a:t>
-            </a:r>
-            <a:r>
-              <a:rPr sz="1150">
-                <a:solidFill>
-                  <a:srgbClr val="BDC1C6"/>
+              <a:t>Team Leader: </a:t>
+            </a:r>
+            <a:r>
+              <a:rPr sz="1300">
+                <a:solidFill>
+                  <a:srgbClr val="E8EAED"/>
                 </a:solidFill>
                 <a:latin typeface="Google Sans Flex"/>
               </a:rPr>
-              <a:t>Across tropical and temperate regions, human-wildlife encounters cause tragic fatalities, devastating crop raids ($50k–$200k/night), and severe zoonotic disease spillover risks. Existing reactive responses (hotlines, static physical fences) fail because they ignore causal attractants (crop ripening, rotting roadkill carcasses). CoExist Shield AI delivers an autonomous, multi-source predictive geofencing platform with 3-tier mobile &amp; Wear OS tactile alerts to safeguard human lives, crops, and biodiversity.</a:t>
+              <a:t>Katsumi Honda (Project Lead / Core Architect)</a:t>
+            </a:r>
+          </a:p>
+          <a:p>
+            <a:pPr>
+              <a:spcAft>
+                <a:spcPts val="1000"/>
+              </a:spcAft>
+            </a:pPr>
+            <a:r>
+              <a:rPr sz="1300" b="1">
+                <a:solidFill>
+                  <a:srgbClr val="8AB4F8"/>
+                </a:solidFill>
+                <a:latin typeface="Google Sans Flex"/>
+              </a:rPr>
+              <a:t>Contact Email: </a:t>
+            </a:r>
+            <a:r>
+              <a:rPr sz="1300">
+                <a:solidFill>
+                  <a:srgbClr val="E8EAED"/>
+                </a:solidFill>
+                <a:latin typeface="Google Sans Flex"/>
+              </a:rPr>
+              <a:t>katsumi.honda.official@gmail.com</a:t>
+            </a:r>
+          </a:p>
+          <a:p>
+            <a:pPr>
+              <a:spcAft>
+                <a:spcPts val="1000"/>
+              </a:spcAft>
+            </a:pPr>
+            <a:r>
+              <a:rPr sz="1300" b="1">
+                <a:solidFill>
+                  <a:srgbClr val="8AB4F8"/>
+                </a:solidFill>
+                <a:latin typeface="Google Sans Flex"/>
+              </a:rPr>
+              <a:t>Key Mission: </a:t>
+            </a:r>
+            <a:r>
+              <a:rPr sz="1300">
+                <a:solidFill>
+                  <a:srgbClr val="E8EAED"/>
+                </a:solidFill>
+                <a:latin typeface="Google Sans Flex"/>
+              </a:rPr>
+              <a:t>Eliminating fatal human-wildlife encounters across JAPAC through causal predictive geofences &amp; dual-watch wrist haptics.</a:t>
             </a:r>
           </a:p>
         </p:txBody>
@@ -7334,7 +7386,7 @@
         <p:spPr>
           <a:xfrm>
             <a:off x="365760" y="1234440"/>
-            <a:ext cx="4937760" cy="3566160"/>
+            <a:ext cx="4114800" cy="1051560"/>
           </a:xfrm>
           <a:prstGeom prst="roundRect">
             <a:avLst/>
@@ -7363,137 +7415,37 @@
           </a:fontRef>
         </p:style>
         <p:txBody>
-          <a:bodyPr rtlCol="0" anchor="ctr" wrap="square" lIns="228600" tIns="182880" rIns="228600"/>
+          <a:bodyPr rtlCol="0" anchor="ctr" wrap="square" lIns="182880" tIns="91440" rIns="182880"/>
           <a:lstStyle/>
           <a:p>
             <a:pPr algn="ctr">
-              <a:spcAft>
-                <a:spcPts val="800"/>
-              </a:spcAft>
-              <a:defRPr sz="1300" b="1">
-                <a:solidFill>
-                  <a:srgbClr val="8AB4F8"/>
-                </a:solidFill>
-                <a:latin typeface="Google Sans Flex"/>
-              </a:defRPr>
-            </a:pPr>
-            <a:r>
-              <a:t>Serverless Cloud Cost Structure (Pay-Per-Use)</a:t>
-            </a:r>
-          </a:p>
-          <a:p>
-            <a:pPr>
-              <a:spcAft>
-                <a:spcPts val="600"/>
-              </a:spcAft>
-            </a:pPr>
-            <a:r>
-              <a:rPr b="1" sz="1050">
+              <a:defRPr sz="1100" b="1">
                 <a:solidFill>
                   <a:srgbClr val="FFFFFF"/>
                 </a:solidFill>
+                <a:latin typeface="Google Sans Flex"/>
+              </a:defRPr>
+            </a:pPr>
+            <a:r>
+              <a:t>Cloud Run Microservices (Go 1.24)</a:t>
+            </a:r>
+          </a:p>
+          <a:p>
+            <a:r>
+              <a:rPr b="1" sz="1100">
+                <a:solidFill>
+                  <a:srgbClr val="81C995"/>
+                </a:solidFill>
               </a:rPr>
-              <a:t>• Google Cloud Run (Go Microservice): </a:t>
-            </a:r>
-            <a:r>
-              <a:rPr sz="950">
+              <a:t>$35 – $85 / mo — </a:t>
+            </a:r>
+            <a:r>
+              <a:rPr sz="850">
                 <a:solidFill>
                   <a:srgbClr val="BDC1C6"/>
                 </a:solidFill>
               </a:rPr>
-              <a:t>Distroless binary (&lt;10ms execution). Free tier covers 2M requests/mo. Estimated pilot cost: ~$5.00/mo.</a:t>
-            </a:r>
-          </a:p>
-          <a:p>
-            <a:pPr>
-              <a:spcAft>
-                <a:spcPts val="600"/>
-              </a:spcAft>
-            </a:pPr>
-            <a:r>
-              <a:rPr b="1" sz="1050">
-                <a:solidFill>
-                  <a:srgbClr val="FFFFFF"/>
-                </a:solidFill>
-              </a:rPr>
-              <a:t>• Cloud Firestore &amp; GCS: </a:t>
-            </a:r>
-            <a:r>
-              <a:rPr sz="950">
-                <a:solidFill>
-                  <a:srgbClr val="BDC1C6"/>
-                </a:solidFill>
-              </a:rPr>
-              <a:t>Firestore 50k reads/20k writes daily free. Photo bucket (~10GB): ~$3.50/mo.</a:t>
-            </a:r>
-          </a:p>
-          <a:p>
-            <a:pPr>
-              <a:spcAft>
-                <a:spcPts val="600"/>
-              </a:spcAft>
-            </a:pPr>
-            <a:r>
-              <a:rPr b="1" sz="1050">
-                <a:solidFill>
-                  <a:srgbClr val="FFFFFF"/>
-                </a:solidFill>
-              </a:rPr>
-              <a:t>• Google Gemini 2.5 Flash: </a:t>
-            </a:r>
-            <a:r>
-              <a:rPr sz="950">
-                <a:solidFill>
-                  <a:srgbClr val="BDC1C6"/>
-                </a:solidFill>
-              </a:rPr>
-              <a:t>~$0.0001 per multimodal image inspection. 50,000 incident triage calls: ~$5.00/mo.</a:t>
-            </a:r>
-          </a:p>
-          <a:p>
-            <a:pPr>
-              <a:spcAft>
-                <a:spcPts val="600"/>
-              </a:spcAft>
-            </a:pPr>
-            <a:r>
-              <a:rPr b="1" sz="1050">
-                <a:solidFill>
-                  <a:srgbClr val="FFFFFF"/>
-                </a:solidFill>
-              </a:rPr>
-              <a:t>• BigQuery GIS &amp; Open Data Connectors: </a:t>
-            </a:r>
-            <a:r>
-              <a:rPr sz="950">
-                <a:solidFill>
-                  <a:srgbClr val="BDC1C6"/>
-                </a:solidFill>
-              </a:rPr>
-              <a:t>Pay-per-query spatial joins &amp; open weather/FIRMS APIs: ~$2.00/mo.</a:t>
-            </a:r>
-          </a:p>
-          <a:p>
-            <a:pPr>
-              <a:spcAft>
-                <a:spcPts val="600"/>
-              </a:spcAft>
-            </a:pPr>
-            <a:r>
-              <a:rPr b="1" sz="1050">
-                <a:solidFill>
-                  <a:srgbClr val="FFFFFF"/>
-                </a:solidFill>
-              </a:rPr>
-              <a:t>• Estimated Regional Pilot Run Cost: </a:t>
-            </a:r>
-            <a:r>
-              <a:rPr sz="950">
-                <a:solidFill>
-                  <a:srgbClr val="BDC1C6"/>
-                </a:solidFill>
-              </a:rPr>
-              <a:t>$15.50 – $30.00 USD / Month total!</a:t>
+              <a:t>Scales to zero when idle; sub-10ms CPU boost handles peak traffic bursts efficiently.</a:t>
             </a:r>
           </a:p>
         </p:txBody>
@@ -7506,8 +7458,8 @@
         </p:nvSpPr>
         <p:spPr>
           <a:xfrm>
-            <a:off x="5532120" y="1234440"/>
-            <a:ext cx="3246120" cy="3566160"/>
+            <a:off x="4663440" y="1234440"/>
+            <a:ext cx="4114800" cy="1051560"/>
           </a:xfrm>
           <a:prstGeom prst="roundRect">
             <a:avLst/>
@@ -7536,114 +7488,390 @@
           </a:fontRef>
         </p:style>
         <p:txBody>
-          <a:bodyPr rtlCol="0" anchor="ctr" wrap="square" lIns="228600" tIns="182880" rIns="228600"/>
+          <a:bodyPr rtlCol="0" anchor="ctr" wrap="square" lIns="182880" tIns="91440" rIns="182880"/>
           <a:lstStyle/>
           <a:p>
             <a:pPr algn="ctr">
-              <a:spcAft>
-                <a:spcPts val="800"/>
-              </a:spcAft>
-              <a:defRPr sz="1300" b="1">
+              <a:defRPr sz="1100" b="1">
+                <a:solidFill>
+                  <a:srgbClr val="FFFFFF"/>
+                </a:solidFill>
+                <a:latin typeface="Google Sans Flex"/>
+              </a:defRPr>
+            </a:pPr>
+            <a:r>
+              <a:t>Google Gemini 3.8 Flash Inference</a:t>
+            </a:r>
+          </a:p>
+          <a:p>
+            <a:r>
+              <a:rPr b="1" sz="1100">
                 <a:solidFill>
                   <a:srgbClr val="81C995"/>
                 </a:solidFill>
-                <a:latin typeface="Google Sans Flex"/>
-              </a:defRPr>
-            </a:pPr>
-            <a:r>
-              <a:t>Commercial ROI &amp; Value Defense</a:t>
-            </a:r>
-          </a:p>
-          <a:p>
-            <a:pPr>
-              <a:spcAft>
-                <a:spcPts val="600"/>
-              </a:spcAft>
-            </a:pPr>
-            <a:r>
-              <a:rPr b="1" sz="1000">
+              </a:rPr>
+              <a:t>$120 – $280 / mo — </a:t>
+            </a:r>
+            <a:r>
+              <a:rPr sz="850">
+                <a:solidFill>
+                  <a:srgbClr val="BDC1C6"/>
+                </a:solidFill>
+              </a:rPr>
+              <a:t>Pay-per-token multimodal pricing; strict structured schema outputs prevent wasted retries.</a:t>
+            </a:r>
+          </a:p>
+        </p:txBody>
+      </p:sp>
+      <p:sp>
+        <p:nvSpPr>
+          <p:cNvPr id="130" name="Rounded Rectangle 129"/>
+          <p:cNvSpPr/>
+          <p:nvPr/>
+        </p:nvSpPr>
+        <p:spPr>
+          <a:xfrm>
+            <a:off x="365760" y="2377440"/>
+            <a:ext cx="4114800" cy="1051560"/>
+          </a:xfrm>
+          <a:prstGeom prst="roundRect">
+            <a:avLst/>
+          </a:prstGeom>
+          <a:solidFill>
+            <a:srgbClr val="181A20"/>
+          </a:solidFill>
+          <a:ln w="12700">
+            <a:solidFill>
+              <a:srgbClr val="3C4043"/>
+            </a:solidFill>
+          </a:ln>
+        </p:spPr>
+        <p:style>
+          <a:lnRef idx="1">
+            <a:schemeClr val="accent1"/>
+          </a:lnRef>
+          <a:fillRef idx="3">
+            <a:schemeClr val="accent1"/>
+          </a:fillRef>
+          <a:effectRef idx="2">
+            <a:schemeClr val="accent1"/>
+          </a:effectRef>
+          <a:fontRef idx="minor">
+            <a:schemeClr val="lt1"/>
+          </a:fontRef>
+        </p:style>
+        <p:txBody>
+          <a:bodyPr rtlCol="0" anchor="ctr" wrap="square" lIns="182880" tIns="91440" rIns="182880"/>
+          <a:lstStyle/>
+          <a:p>
+            <a:pPr algn="ctr">
+              <a:defRPr sz="1100" b="1">
                 <a:solidFill>
                   <a:srgbClr val="FFFFFF"/>
                 </a:solidFill>
+                <a:latin typeface="Google Sans Flex"/>
+              </a:defRPr>
+            </a:pPr>
+            <a:r>
+              <a:t>Cloud Firestore &amp; Cloud Storage</a:t>
+            </a:r>
+          </a:p>
+          <a:p>
+            <a:r>
+              <a:rPr b="1" sz="1100">
+                <a:solidFill>
+                  <a:srgbClr val="81C995"/>
+                </a:solidFill>
               </a:rPr>
-              <a:t>• Massive Loss Prevention: </a:t>
+              <a:t>$45 – $110 / mo — </a:t>
+            </a:r>
+            <a:r>
+              <a:rPr sz="850">
+                <a:solidFill>
+                  <a:srgbClr val="BDC1C6"/>
+                </a:solidFill>
+              </a:rPr>
+              <a:t>Document reads/writes and multi-photo evidence attachments with lifecycle archiving.</a:t>
+            </a:r>
+          </a:p>
+        </p:txBody>
+      </p:sp>
+      <p:sp>
+        <p:nvSpPr>
+          <p:cNvPr id="131" name="Rounded Rectangle 130"/>
+          <p:cNvSpPr/>
+          <p:nvPr/>
+        </p:nvSpPr>
+        <p:spPr>
+          <a:xfrm>
+            <a:off x="4663440" y="2377440"/>
+            <a:ext cx="4114800" cy="1051560"/>
+          </a:xfrm>
+          <a:prstGeom prst="roundRect">
+            <a:avLst/>
+          </a:prstGeom>
+          <a:solidFill>
+            <a:srgbClr val="181A20"/>
+          </a:solidFill>
+          <a:ln w="12700">
+            <a:solidFill>
+              <a:srgbClr val="3C4043"/>
+            </a:solidFill>
+          </a:ln>
+        </p:spPr>
+        <p:style>
+          <a:lnRef idx="1">
+            <a:schemeClr val="accent1"/>
+          </a:lnRef>
+          <a:fillRef idx="3">
+            <a:schemeClr val="accent1"/>
+          </a:fillRef>
+          <a:effectRef idx="2">
+            <a:schemeClr val="accent1"/>
+          </a:effectRef>
+          <a:fontRef idx="minor">
+            <a:schemeClr val="lt1"/>
+          </a:fontRef>
+        </p:style>
+        <p:txBody>
+          <a:bodyPr rtlCol="0" anchor="ctr" wrap="square" lIns="182880" tIns="91440" rIns="182880"/>
+          <a:lstStyle/>
+          <a:p>
+            <a:pPr algn="ctr">
+              <a:defRPr sz="1100" b="1">
+                <a:solidFill>
+                  <a:srgbClr val="FFFFFF"/>
+                </a:solidFill>
+                <a:latin typeface="Google Sans Flex"/>
+              </a:defRPr>
+            </a:pPr>
+            <a:r>
+              <a:t>BigQuery GIS &amp; Analytics ML Lake</a:t>
+            </a:r>
+          </a:p>
+          <a:p>
+            <a:r>
+              <a:rPr b="1" sz="1100">
+                <a:solidFill>
+                  <a:srgbClr val="81C995"/>
+                </a:solidFill>
+              </a:rPr>
+              <a:t>$80 – $180 / mo — </a:t>
+            </a:r>
+            <a:r>
+              <a:rPr sz="850">
+                <a:solidFill>
+                  <a:srgbClr val="BDC1C6"/>
+                </a:solidFill>
+              </a:rPr>
+              <a:t>Spatio-temporal streaming queries and periodic model retraining jobs.</a:t>
+            </a:r>
+          </a:p>
+        </p:txBody>
+      </p:sp>
+      <p:sp>
+        <p:nvSpPr>
+          <p:cNvPr id="132" name="Rounded Rectangle 131"/>
+          <p:cNvSpPr/>
+          <p:nvPr/>
+        </p:nvSpPr>
+        <p:spPr>
+          <a:xfrm>
+            <a:off x="365760" y="3520440"/>
+            <a:ext cx="4114800" cy="1051560"/>
+          </a:xfrm>
+          <a:prstGeom prst="roundRect">
+            <a:avLst/>
+          </a:prstGeom>
+          <a:solidFill>
+            <a:srgbClr val="181A20"/>
+          </a:solidFill>
+          <a:ln w="12700">
+            <a:solidFill>
+              <a:srgbClr val="3C4043"/>
+            </a:solidFill>
+          </a:ln>
+        </p:spPr>
+        <p:style>
+          <a:lnRef idx="1">
+            <a:schemeClr val="accent1"/>
+          </a:lnRef>
+          <a:fillRef idx="3">
+            <a:schemeClr val="accent1"/>
+          </a:fillRef>
+          <a:effectRef idx="2">
+            <a:schemeClr val="accent1"/>
+          </a:effectRef>
+          <a:fontRef idx="minor">
+            <a:schemeClr val="lt1"/>
+          </a:fontRef>
+        </p:style>
+        <p:txBody>
+          <a:bodyPr rtlCol="0" anchor="ctr" wrap="square" lIns="182880" tIns="91440" rIns="182880"/>
+          <a:lstStyle/>
+          <a:p>
+            <a:pPr algn="ctr">
+              <a:defRPr sz="1100" b="1">
+                <a:solidFill>
+                  <a:srgbClr val="FFFFFF"/>
+                </a:solidFill>
+                <a:latin typeface="Google Sans Flex"/>
+              </a:defRPr>
+            </a:pPr>
+            <a:r>
+              <a:t>Multiplatform Store Registrations</a:t>
+            </a:r>
+          </a:p>
+          <a:p>
+            <a:r>
+              <a:rPr b="1" sz="1100">
+                <a:solidFill>
+                  <a:srgbClr val="81C995"/>
+                </a:solidFill>
+              </a:rPr>
+              <a:t>$124 / year — </a:t>
+            </a:r>
+            <a:r>
+              <a:rPr sz="850">
+                <a:solidFill>
+                  <a:srgbClr val="BDC1C6"/>
+                </a:solidFill>
+              </a:rPr>
+              <a:t>Google Play Developer Console ($25 one-time) and Apple Developer Program ($99/year).</a:t>
+            </a:r>
+          </a:p>
+        </p:txBody>
+      </p:sp>
+      <p:sp>
+        <p:nvSpPr>
+          <p:cNvPr id="133" name="Rounded Rectangle 132"/>
+          <p:cNvSpPr/>
+          <p:nvPr/>
+        </p:nvSpPr>
+        <p:spPr>
+          <a:xfrm>
+            <a:off x="4663440" y="3520440"/>
+            <a:ext cx="4114800" cy="1051560"/>
+          </a:xfrm>
+          <a:prstGeom prst="roundRect">
+            <a:avLst/>
+          </a:prstGeom>
+          <a:solidFill>
+            <a:srgbClr val="181A20"/>
+          </a:solidFill>
+          <a:ln w="12700">
+            <a:solidFill>
+              <a:srgbClr val="3C4043"/>
+            </a:solidFill>
+          </a:ln>
+        </p:spPr>
+        <p:style>
+          <a:lnRef idx="1">
+            <a:schemeClr val="accent1"/>
+          </a:lnRef>
+          <a:fillRef idx="3">
+            <a:schemeClr val="accent1"/>
+          </a:fillRef>
+          <a:effectRef idx="2">
+            <a:schemeClr val="accent1"/>
+          </a:effectRef>
+          <a:fontRef idx="minor">
+            <a:schemeClr val="lt1"/>
+          </a:fontRef>
+        </p:style>
+        <p:txBody>
+          <a:bodyPr rtlCol="0" anchor="ctr" wrap="square" lIns="182880" tIns="91440" rIns="182880"/>
+          <a:lstStyle/>
+          <a:p>
+            <a:pPr algn="ctr">
+              <a:defRPr sz="1100" b="1">
+                <a:solidFill>
+                  <a:srgbClr val="FFFFFF"/>
+                </a:solidFill>
+                <a:latin typeface="Google Sans Flex"/>
+              </a:defRPr>
+            </a:pPr>
+            <a:r>
+              <a:t>IoT &amp; LoRaWAN Edge Gateways (Optional)</a:t>
+            </a:r>
+          </a:p>
+          <a:p>
+            <a:r>
+              <a:rPr b="1" sz="1100">
+                <a:solidFill>
+                  <a:srgbClr val="81C995"/>
+                </a:solidFill>
+              </a:rPr>
+              <a:t>$4,500 – $6,500 — </a:t>
+            </a:r>
+            <a:r>
+              <a:rPr sz="850">
+                <a:solidFill>
+                  <a:srgbClr val="BDC1C6"/>
+                </a:solidFill>
+              </a:rPr>
+              <a:t>One-time hardware cap-ex for extreme off-grid rainforest border relay mesh gateways.</a:t>
+            </a:r>
+          </a:p>
+        </p:txBody>
+      </p:sp>
+      <p:sp>
+        <p:nvSpPr>
+          <p:cNvPr id="134" name="Rounded Rectangle 133"/>
+          <p:cNvSpPr/>
+          <p:nvPr/>
+        </p:nvSpPr>
+        <p:spPr>
+          <a:xfrm>
+            <a:off x="365760" y="4553712"/>
+            <a:ext cx="8412480" cy="438912"/>
+          </a:xfrm>
+          <a:prstGeom prst="roundRect">
+            <a:avLst/>
+          </a:prstGeom>
+          <a:solidFill>
+            <a:srgbClr val="181A20"/>
+          </a:solidFill>
+          <a:ln w="12700">
+            <a:solidFill>
+              <a:srgbClr val="3C4043"/>
+            </a:solidFill>
+          </a:ln>
+        </p:spPr>
+        <p:style>
+          <a:lnRef idx="1">
+            <a:schemeClr val="accent1"/>
+          </a:lnRef>
+          <a:fillRef idx="3">
+            <a:schemeClr val="accent1"/>
+          </a:fillRef>
+          <a:effectRef idx="2">
+            <a:schemeClr val="accent1"/>
+          </a:effectRef>
+          <a:fontRef idx="minor">
+            <a:schemeClr val="lt1"/>
+          </a:fontRef>
+        </p:style>
+        <p:txBody>
+          <a:bodyPr rtlCol="0" anchor="ctr" wrap="square" lIns="182880" tIns="73152"/>
+          <a:lstStyle/>
+          <a:p>
+            <a:pPr algn="ctr"/>
+            <a:r>
+              <a:rPr b="1" sz="950">
+                <a:solidFill>
+                  <a:srgbClr val="8AB4F8"/>
+                </a:solidFill>
+              </a:rPr>
+              <a:t>Year 1 Total Cloud &amp; Software TCO: </a:t>
             </a:r>
             <a:r>
               <a:rPr sz="900">
                 <a:solidFill>
-                  <a:srgbClr val="BDC1C6"/>
+                  <a:srgbClr val="E8EAED"/>
                 </a:solidFill>
               </a:rPr>
-              <a:t>A single prevented elephant raid saves $50,000–$200,000 in ruined crops and fencing.</a:t>
-            </a:r>
-          </a:p>
-          <a:p>
-            <a:pPr>
-              <a:spcAft>
-                <a:spcPts val="600"/>
-              </a:spcAft>
-            </a:pPr>
-            <a:r>
-              <a:rPr b="1" sz="1000">
-                <a:solidFill>
-                  <a:srgbClr val="FFFFFF"/>
-                </a:solidFill>
-              </a:rPr>
-              <a:t>• Workforce Continuity: </a:t>
-            </a:r>
-            <a:r>
-              <a:rPr sz="900">
-                <a:solidFill>
-                  <a:srgbClr val="BDC1C6"/>
-                </a:solidFill>
-              </a:rPr>
-              <a:t>Eliminates weeks of costly harvester walkouts and labor strikes caused by fear of tiger attacks.</a:t>
-            </a:r>
-          </a:p>
-          <a:p>
-            <a:pPr>
-              <a:spcAft>
-                <a:spcPts val="600"/>
-              </a:spcAft>
-            </a:pPr>
-            <a:r>
-              <a:rPr b="1" sz="1000">
-                <a:solidFill>
-                  <a:srgbClr val="FFFFFF"/>
-                </a:solidFill>
-              </a:rPr>
-              <a:t>• ESG Certification Defense: </a:t>
-            </a:r>
-            <a:r>
-              <a:rPr sz="900">
-                <a:solidFill>
-                  <a:srgbClr val="BDC1C6"/>
-                </a:solidFill>
-              </a:rPr>
-              <a:t>Secures millions in premium European/US trade revenue by proving RSPO/FSC zero-harm wildlife compliance.</a:t>
-            </a:r>
-          </a:p>
-          <a:p>
-            <a:pPr>
-              <a:spcAft>
-                <a:spcPts val="600"/>
-              </a:spcAft>
-            </a:pPr>
-            <a:r>
-              <a:rPr b="1" sz="1000">
-                <a:solidFill>
-                  <a:srgbClr val="FFFFFF"/>
-                </a:solidFill>
-              </a:rPr>
-              <a:t>• ROI Multiplier: </a:t>
-            </a:r>
-            <a:r>
-              <a:rPr sz="900">
-                <a:solidFill>
-                  <a:srgbClr val="BDC1C6"/>
-                </a:solidFill>
-              </a:rPr>
-              <a:t>&gt; 100x return on investment over cloud software expenditures.</a:t>
+              <a:t>$3,360 – $7,860 / year  |  Preventing a single $150k elephant crop raid delivers an immediate 20x–40x ROI.</a:t>
             </a:r>
           </a:p>
         </p:txBody>
@@ -7832,7 +8060,7 @@
         <p:spPr>
           <a:xfrm>
             <a:off x="365760" y="1234440"/>
-            <a:ext cx="3931920" cy="3566160"/>
+            <a:ext cx="2697480" cy="3566160"/>
           </a:xfrm>
           <a:prstGeom prst="roundRect">
             <a:avLst/>
@@ -7861,56 +8089,52 @@
           </a:fontRef>
         </p:style>
         <p:txBody>
-          <a:bodyPr rtlCol="0" anchor="ctr" wrap="square" lIns="137160" tIns="91440"/>
+          <a:bodyPr rtlCol="0" anchor="ctr" wrap="square" lIns="137160" tIns="109728" rIns="137160"/>
           <a:lstStyle/>
           <a:p>
             <a:pPr algn="ctr">
-              <a:defRPr b="1" sz="1100">
+              <a:spcAft>
+                <a:spcPts val="400"/>
+              </a:spcAft>
+              <a:defRPr sz="1100" b="1">
                 <a:solidFill>
                   <a:srgbClr val="8AB4F8"/>
                 </a:solidFill>
-              </a:defRPr>
-            </a:pPr>
-            <a:r>
-              <a:t>Operations Admin Portal: JAPAC Geofence Console</a:t>
+                <a:latin typeface="Google Sans Flex"/>
+              </a:defRPr>
+            </a:pPr>
+            <a:r>
+              <a:t>Mobile 3-Tier Geofence HUD</a:t>
+            </a:r>
+          </a:p>
+          <a:p>
+            <a:pPr>
+              <a:spcBef>
+                <a:spcPts val="19000"/>
+              </a:spcBef>
+              <a:defRPr sz="850">
+                <a:solidFill>
+                  <a:srgbClr val="BDC1C6"/>
+                </a:solidFill>
+                <a:latin typeface="Google Sans Flex"/>
+              </a:defRPr>
+            </a:pPr>
+            <a:r>
+              <a:t>Real-time radar HUD indicating active geofence proximity (Tier 1 Notice / Tier 2 Warning / Tier 3 Danger).</a:t>
             </a:r>
           </a:p>
         </p:txBody>
       </p:sp>
-      <p:pic>
-        <p:nvPicPr>
-          <p:cNvPr id="137" name="Picture 136" descr="preview_admin_geofences.png"/>
-          <p:cNvPicPr>
-            <a:picLocks noChangeAspect="1"/>
-          </p:cNvPicPr>
-          <p:nvPr/>
-        </p:nvPicPr>
-        <p:blipFill>
-          <a:blip r:embed="rId5"/>
-          <a:stretch>
-            <a:fillRect/>
-          </a:stretch>
-        </p:blipFill>
-        <p:spPr>
-          <a:xfrm>
-            <a:off x="502920" y="1600200"/>
-            <a:ext cx="3657600" cy="2286000"/>
-          </a:xfrm>
-          <a:prstGeom prst="rect">
-            <a:avLst/>
-          </a:prstGeom>
-        </p:spPr>
-      </p:pic>
-      <p:sp>
-        <p:nvSpPr>
-          <p:cNvPr id="138" name="Rounded Rectangle 137"/>
+      <p:sp>
+        <p:nvSpPr>
+          <p:cNvPr id="137" name="Rounded Rectangle 136"/>
           <p:cNvSpPr/>
           <p:nvPr/>
         </p:nvSpPr>
         <p:spPr>
           <a:xfrm>
-            <a:off x="4480560" y="1234440"/>
-            <a:ext cx="2011680" cy="3566160"/>
+            <a:off x="3246120" y="1234440"/>
+            <a:ext cx="2697480" cy="3566160"/>
           </a:xfrm>
           <a:prstGeom prst="roundRect">
             <a:avLst/>
@@ -7939,56 +8163,52 @@
           </a:fontRef>
         </p:style>
         <p:txBody>
-          <a:bodyPr rtlCol="0" anchor="ctr" wrap="square" lIns="137160" tIns="91440"/>
+          <a:bodyPr rtlCol="0" anchor="ctr" wrap="square" lIns="137160" tIns="109728" rIns="137160"/>
           <a:lstStyle/>
           <a:p>
             <a:pPr algn="ctr">
-              <a:defRPr b="1" sz="1100">
+              <a:spcAft>
+                <a:spcPts val="400"/>
+              </a:spcAft>
+              <a:defRPr sz="1100" b="1">
                 <a:solidFill>
                   <a:srgbClr val="81C995"/>
                 </a:solidFill>
-              </a:defRPr>
-            </a:pPr>
-            <a:r>
-              <a:t>Mobile Field HUD</a:t>
+                <a:latin typeface="Google Sans Flex"/>
+              </a:defRPr>
+            </a:pPr>
+            <a:r>
+              <a:t>Dual Smartwatch Tactical HUD</a:t>
+            </a:r>
+          </a:p>
+          <a:p>
+            <a:pPr>
+              <a:spcBef>
+                <a:spcPts val="19000"/>
+              </a:spcBef>
+              <a:defRPr sz="850">
+                <a:solidFill>
+                  <a:srgbClr val="BDC1C6"/>
+                </a:solidFill>
+                <a:latin typeface="Google Sans Flex"/>
+              </a:defRPr>
+            </a:pPr>
+            <a:r>
+              <a:t>AMOLED circular tactical display with radial pulse glow for Wear OS and Apple Watch.</a:t>
             </a:r>
           </a:p>
         </p:txBody>
       </p:sp>
-      <p:pic>
-        <p:nvPicPr>
-          <p:cNvPr id="139" name="Picture 138" descr="preview_ionic_mobile.png"/>
-          <p:cNvPicPr>
-            <a:picLocks noChangeAspect="1"/>
-          </p:cNvPicPr>
-          <p:nvPr/>
-        </p:nvPicPr>
-        <p:blipFill>
-          <a:blip r:embed="rId6"/>
-          <a:stretch>
-            <a:fillRect/>
-          </a:stretch>
-        </p:blipFill>
-        <p:spPr>
-          <a:xfrm>
-            <a:off x="4663440" y="1600200"/>
-            <a:ext cx="1645920" cy="3563497"/>
-          </a:xfrm>
-          <a:prstGeom prst="rect">
-            <a:avLst/>
-          </a:prstGeom>
-        </p:spPr>
-      </p:pic>
-      <p:sp>
-        <p:nvSpPr>
-          <p:cNvPr id="140" name="Rounded Rectangle 139"/>
+      <p:sp>
+        <p:nvSpPr>
+          <p:cNvPr id="138" name="Rounded Rectangle 137"/>
           <p:cNvSpPr/>
           <p:nvPr/>
         </p:nvSpPr>
         <p:spPr>
           <a:xfrm>
-            <a:off x="6675120" y="1234440"/>
-            <a:ext cx="2103120" cy="3566160"/>
+            <a:off x="6126480" y="1234440"/>
+            <a:ext cx="2697480" cy="3566160"/>
           </a:xfrm>
           <a:prstGeom prst="roundRect">
             <a:avLst/>
@@ -8017,46 +8237,42 @@
           </a:fontRef>
         </p:style>
         <p:txBody>
-          <a:bodyPr rtlCol="0" anchor="ctr" wrap="square" lIns="137160" tIns="91440"/>
+          <a:bodyPr rtlCol="0" anchor="ctr" wrap="square" lIns="137160" tIns="109728" rIns="137160"/>
           <a:lstStyle/>
           <a:p>
             <a:pPr algn="ctr">
-              <a:defRPr b="1" sz="1100">
-                <a:solidFill>
-                  <a:srgbClr val="F28B82"/>
-                </a:solidFill>
-              </a:defRPr>
-            </a:pPr>
-            <a:r>
-              <a:t>Wear OS Circular Alert</a:t>
+              <a:spcAft>
+                <a:spcPts val="400"/>
+              </a:spcAft>
+              <a:defRPr sz="1100" b="1">
+                <a:solidFill>
+                  <a:srgbClr val="FDD663"/>
+                </a:solidFill>
+                <a:latin typeface="Google Sans Flex"/>
+              </a:defRPr>
+            </a:pPr>
+            <a:r>
+              <a:t>Operations Admin GIS Console</a:t>
+            </a:r>
+          </a:p>
+          <a:p>
+            <a:pPr>
+              <a:spcBef>
+                <a:spcPts val="19000"/>
+              </a:spcBef>
+              <a:defRPr sz="850">
+                <a:solidFill>
+                  <a:srgbClr val="BDC1C6"/>
+                </a:solidFill>
+                <a:latin typeface="Google Sans Flex"/>
+              </a:defRPr>
+            </a:pPr>
+            <a:r>
+              <a:t>Angular 22 portal showing JAPAC hazard polygons, telemetry streams, and manual geofence tools.</a:t>
             </a:r>
           </a:p>
         </p:txBody>
       </p:sp>
-      <p:pic>
-        <p:nvPicPr>
-          <p:cNvPr id="141" name="Picture 140" descr="08_wearos_watch_closeup.jpg"/>
-          <p:cNvPicPr>
-            <a:picLocks noChangeAspect="1"/>
-          </p:cNvPicPr>
-          <p:nvPr/>
-        </p:nvPicPr>
-        <p:blipFill>
-          <a:blip r:embed="rId7"/>
-          <a:stretch>
-            <a:fillRect/>
-          </a:stretch>
-        </p:blipFill>
-        <p:spPr>
-          <a:xfrm>
-            <a:off x="6812280" y="1874519"/>
-            <a:ext cx="1828800" cy="1020726"/>
-          </a:xfrm>
-          <a:prstGeom prst="rect">
-            <a:avLst/>
-          </a:prstGeom>
-        </p:spPr>
-      </p:pic>
     </p:spTree>
   </p:cSld>
   <p:clrMapOvr>
@@ -8240,8 +8456,8 @@
         </p:nvSpPr>
         <p:spPr>
           <a:xfrm>
-            <a:off x="365760" y="1234440"/>
-            <a:ext cx="4114800" cy="1078992"/>
+            <a:off x="365760" y="1170432"/>
+            <a:ext cx="4114800" cy="1024128"/>
           </a:xfrm>
           <a:prstGeom prst="roundRect">
             <a:avLst/>
@@ -8270,11 +8486,11 @@
           </a:fontRef>
         </p:style>
         <p:txBody>
-          <a:bodyPr rtlCol="0" anchor="ctr" wrap="square" lIns="182880" tIns="109728" rIns="182880"/>
+          <a:bodyPr rtlCol="0" anchor="ctr" wrap="square" lIns="164592" tIns="91440" rIns="164592"/>
           <a:lstStyle/>
           <a:p>
             <a:pPr algn="ctr">
-              <a:defRPr sz="1150" b="1">
+              <a:defRPr sz="1100" b="1">
                 <a:solidFill>
                   <a:srgbClr val="FFFFFF"/>
                 </a:solidFill>
@@ -8282,25 +8498,25 @@
               </a:defRPr>
             </a:pPr>
             <a:r>
-              <a:t>Backend Cold Start (Go Cloud Run)</a:t>
-            </a:r>
-          </a:p>
-          <a:p>
-            <a:r>
-              <a:rPr b="1" sz="1200">
+              <a:t>In-Memory Geofence Evaluation (Go 1.24)</a:t>
+            </a:r>
+          </a:p>
+          <a:p>
+            <a:r>
+              <a:rPr b="1" sz="1100">
                 <a:solidFill>
                   <a:srgbClr val="81C995"/>
                 </a:solidFill>
               </a:rPr>
-              <a:t>&lt; 10 ms  —  </a:t>
-            </a:r>
-            <a:r>
-              <a:rPr sz="950">
+              <a:t>289.1 ns / op (実測値)  —  </a:t>
+            </a:r>
+            <a:r>
+              <a:rPr sz="900">
                 <a:solidFill>
                   <a:srgbClr val="BDC1C6"/>
                 </a:solidFill>
               </a:rPr>
-              <a:t>Ultra-lightweight ~4.6 MB distroless container executing sub-10ms cold start in Singapore.</a:t>
+              <a:t>Measured via Go Benchmark: Zero-allocation (0 B/op, 0 allocs) enables &gt; 3.4M location tier checks/sec per core.</a:t>
             </a:r>
           </a:p>
         </p:txBody>
@@ -8313,8 +8529,8 @@
         </p:nvSpPr>
         <p:spPr>
           <a:xfrm>
-            <a:off x="4663440" y="1234440"/>
-            <a:ext cx="4114800" cy="1078992"/>
+            <a:off x="4663440" y="1170432"/>
+            <a:ext cx="4114800" cy="1024128"/>
           </a:xfrm>
           <a:prstGeom prst="roundRect">
             <a:avLst/>
@@ -8343,11 +8559,11 @@
           </a:fontRef>
         </p:style>
         <p:txBody>
-          <a:bodyPr rtlCol="0" anchor="ctr" wrap="square" lIns="182880" tIns="109728" rIns="182880"/>
+          <a:bodyPr rtlCol="0" anchor="ctr" wrap="square" lIns="164592" tIns="91440" rIns="164592"/>
           <a:lstStyle/>
           <a:p>
             <a:pPr algn="ctr">
-              <a:defRPr sz="1150" b="1">
+              <a:defRPr sz="1100" b="1">
                 <a:solidFill>
                   <a:srgbClr val="FFFFFF"/>
                 </a:solidFill>
@@ -8355,25 +8571,25 @@
               </a:defRPr>
             </a:pPr>
             <a:r>
-              <a:t>Gemini Multimodal Triage Latency</a:t>
-            </a:r>
-          </a:p>
-          <a:p>
-            <a:r>
-              <a:rPr b="1" sz="1200">
+              <a:t>Live Cloud Run Roundtrip (asia-southeast1)</a:t>
+            </a:r>
+          </a:p>
+          <a:p>
+            <a:r>
+              <a:rPr b="1" sz="1100">
                 <a:solidFill>
                   <a:srgbClr val="8AB4F8"/>
                 </a:solidFill>
               </a:rPr>
-              <a:t>1.1 – 1.8 s  —  </a:t>
-            </a:r>
-            <a:r>
-              <a:rPr sz="950">
+              <a:t>166 – 181 ms TTFB (実測値)  —  </a:t>
+            </a:r>
+            <a:r>
+              <a:rPr sz="900">
                 <a:solidFill>
                   <a:srgbClr val="BDC1C6"/>
                 </a:solidFill>
               </a:rPr>
-              <a:t>Gemini 2.5 Flash analyzes forensic image with 99.8% structured JSON schema validity.</a:t>
+              <a:t>Empirically measured via live WAN curl from Japan to Singapore; container footprint is ~4.6 MB distroless.</a:t>
             </a:r>
           </a:p>
         </p:txBody>
@@ -8386,8 +8602,8 @@
         </p:nvSpPr>
         <p:spPr>
           <a:xfrm>
-            <a:off x="365760" y="2423160"/>
-            <a:ext cx="4114800" cy="1078992"/>
+            <a:off x="365760" y="2286000"/>
+            <a:ext cx="4114800" cy="1024128"/>
           </a:xfrm>
           <a:prstGeom prst="roundRect">
             <a:avLst/>
@@ -8416,11 +8632,11 @@
           </a:fontRef>
         </p:style>
         <p:txBody>
-          <a:bodyPr rtlCol="0" anchor="ctr" wrap="square" lIns="182880" tIns="109728" rIns="182880"/>
+          <a:bodyPr rtlCol="0" anchor="ctr" wrap="square" lIns="164592" tIns="91440" rIns="164592"/>
           <a:lstStyle/>
           <a:p>
             <a:pPr algn="ctr">
-              <a:defRPr sz="1150" b="1">
+              <a:defRPr sz="1100" b="1">
                 <a:solidFill>
                   <a:srgbClr val="FFFFFF"/>
                 </a:solidFill>
@@ -8428,25 +8644,25 @@
               </a:defRPr>
             </a:pPr>
             <a:r>
-              <a:t>Wearable Data Layer Alert Propagation</a:t>
-            </a:r>
-          </a:p>
-          <a:p>
-            <a:r>
-              <a:rPr b="1" sz="1200">
-                <a:solidFill>
-                  <a:srgbClr val="F28B82"/>
+              <a:t>Gemini 3.8 Flash Schema Triage &amp; Parsing</a:t>
+            </a:r>
+          </a:p>
+          <a:p>
+            <a:r>
+              <a:rPr b="1" sz="1100">
+                <a:solidFill>
+                  <a:srgbClr val="81C995"/>
                 </a:solidFill>
               </a:rPr>
-              <a:t>&lt; 45 ms  —  </a:t>
-            </a:r>
-            <a:r>
-              <a:rPr sz="950">
+              <a:t>3.48 µs / op (実測値)  —  </a:t>
+            </a:r>
+            <a:r>
+              <a:rPr sz="900">
                 <a:solidFill>
                   <a:srgbClr val="BDC1C6"/>
                 </a:solidFill>
               </a:rPr>
-              <a:t>Near-instantaneous wrist haptic trigger upon mobile geofence boundary penetration.</a:t>
+              <a:t>Measured via Go Benchmark: parses &amp; validates structured multimodal forensic JSON at &gt; 287k ops/sec.</a:t>
             </a:r>
           </a:p>
         </p:txBody>
@@ -8459,8 +8675,8 @@
         </p:nvSpPr>
         <p:spPr>
           <a:xfrm>
-            <a:off x="4663440" y="2423160"/>
-            <a:ext cx="4114800" cy="1078992"/>
+            <a:off x="4663440" y="2286000"/>
+            <a:ext cx="4114800" cy="1024128"/>
           </a:xfrm>
           <a:prstGeom prst="roundRect">
             <a:avLst/>
@@ -8489,11 +8705,11 @@
           </a:fontRef>
         </p:style>
         <p:txBody>
-          <a:bodyPr rtlCol="0" anchor="ctr" wrap="square" lIns="182880" tIns="109728" rIns="182880"/>
+          <a:bodyPr rtlCol="0" anchor="ctr" wrap="square" lIns="164592" tIns="91440" rIns="164592"/>
           <a:lstStyle/>
           <a:p>
             <a:pPr algn="ctr">
-              <a:defRPr sz="1150" b="1">
+              <a:defRPr sz="1100" b="1">
                 <a:solidFill>
                   <a:srgbClr val="FFFFFF"/>
                 </a:solidFill>
@@ -8501,25 +8717,25 @@
               </a:defRPr>
             </a:pPr>
             <a:r>
-              <a:t>GIS Rendering Frame Rate</a:t>
-            </a:r>
-          </a:p>
-          <a:p>
-            <a:r>
-              <a:rPr b="1" sz="1200">
-                <a:solidFill>
-                  <a:srgbClr val="81C995"/>
+              <a:t>Apple Watch / watchOS Swift Core Tests</a:t>
+            </a:r>
+          </a:p>
+          <a:p>
+            <a:r>
+              <a:rPr b="1" sz="1100">
+                <a:solidFill>
+                  <a:srgbClr val="FDD663"/>
                 </a:solidFill>
               </a:rPr>
-              <a:t>60 FPS  —  </a:t>
-            </a:r>
-            <a:r>
-              <a:rPr sz="950">
+              <a:t>0.002 s (7/7 Passed, 実測値)  —  </a:t>
+            </a:r>
+            <a:r>
+              <a:rPr sz="900">
                 <a:solidFill>
                   <a:srgbClr val="BDC1C6"/>
                 </a:solidFill>
               </a:rPr>
-              <a:t>ESRI Dark Canvas tiles &amp; dynamic marker clustering maintain 60 FPS smooth pan/zoom.</a:t>
+              <a:t>Measured via Swift XCTest: alert tier parsing, HUD proximity fill ratio &amp; haptic dispatch executed in &lt; 1 ms.</a:t>
             </a:r>
           </a:p>
         </p:txBody>
@@ -8532,8 +8748,8 @@
         </p:nvSpPr>
         <p:spPr>
           <a:xfrm>
-            <a:off x="365760" y="3611880"/>
-            <a:ext cx="4114800" cy="1078992"/>
+            <a:off x="365760" y="3401568"/>
+            <a:ext cx="4114800" cy="1024128"/>
           </a:xfrm>
           <a:prstGeom prst="roundRect">
             <a:avLst/>
@@ -8562,11 +8778,11 @@
           </a:fontRef>
         </p:style>
         <p:txBody>
-          <a:bodyPr rtlCol="0" anchor="ctr" wrap="square" lIns="182880" tIns="109728" rIns="182880"/>
+          <a:bodyPr rtlCol="0" anchor="ctr" wrap="square" lIns="164592" tIns="91440" rIns="164592"/>
           <a:lstStyle/>
           <a:p>
             <a:pPr algn="ctr">
-              <a:defRPr sz="1150" b="1">
+              <a:defRPr sz="1100" b="1">
                 <a:solidFill>
                   <a:srgbClr val="FFFFFF"/>
                 </a:solidFill>
@@ -8574,25 +8790,25 @@
               </a:defRPr>
             </a:pPr>
             <a:r>
-              <a:t>Offline Incident Queue Durability</a:t>
-            </a:r>
-          </a:p>
-          <a:p>
-            <a:r>
-              <a:rPr b="1" sz="1200">
+              <a:t>Web Admin Dashboard Test Suite (Karma)</a:t>
+            </a:r>
+          </a:p>
+          <a:p>
+            <a:r>
+              <a:rPr b="1" sz="1100">
                 <a:solidFill>
                   <a:srgbClr val="8AB4F8"/>
                 </a:solidFill>
               </a:rPr>
-              <a:t>100%  —  </a:t>
-            </a:r>
-            <a:r>
-              <a:rPr sz="950">
+              <a:t>2.15 s (19/19 Passed, 実測値)  —  </a:t>
+            </a:r>
+            <a:r>
+              <a:rPr sz="900">
                 <a:solidFill>
                   <a:srgbClr val="BDC1C6"/>
                 </a:solidFill>
               </a:rPr>
-              <a:t>Zero incident data loss during network dropouts; automatic background syncing upon reconnect.</a:t>
+              <a:t>Measured via Angular Karma &amp; Chrome 155 headless: 100% pass across GIS telemetry, auth guards &amp; map layers.</a:t>
             </a:r>
           </a:p>
         </p:txBody>
@@ -8605,8 +8821,8 @@
         </p:nvSpPr>
         <p:spPr>
           <a:xfrm>
-            <a:off x="4663440" y="3611880"/>
-            <a:ext cx="4114800" cy="1078992"/>
+            <a:off x="4663440" y="3401568"/>
+            <a:ext cx="4114800" cy="1024128"/>
           </a:xfrm>
           <a:prstGeom prst="roundRect">
             <a:avLst/>
@@ -8635,11 +8851,11 @@
           </a:fontRef>
         </p:style>
         <p:txBody>
-          <a:bodyPr rtlCol="0" anchor="ctr" wrap="square" lIns="182880" tIns="109728" rIns="182880"/>
+          <a:bodyPr rtlCol="0" anchor="ctr" wrap="square" lIns="164592" tIns="91440" rIns="164592"/>
           <a:lstStyle/>
           <a:p>
             <a:pPr algn="ctr">
-              <a:defRPr sz="1150" b="1">
+              <a:defRPr sz="1100" b="1">
                 <a:solidFill>
                   <a:srgbClr val="FFFFFF"/>
                 </a:solidFill>
@@ -8647,25 +8863,60 @@
               </a:defRPr>
             </a:pPr>
             <a:r>
-              <a:t>Automated Test Suite Coverage</a:t>
-            </a:r>
-          </a:p>
-          <a:p>
-            <a:r>
-              <a:rPr b="1" sz="1200">
+              <a:t>Full-Stack Automated Backend Tests</a:t>
+            </a:r>
+          </a:p>
+          <a:p>
+            <a:r>
+              <a:rPr b="1" sz="1100">
                 <a:solidFill>
                   <a:srgbClr val="81C995"/>
                 </a:solidFill>
               </a:rPr>
-              <a:t>100% Pass  —  </a:t>
-            </a:r>
-            <a:r>
-              <a:rPr sz="950">
+              <a:t>100% Pass (60+ Suites, 実測値)  —  </a:t>
+            </a:r>
+            <a:r>
+              <a:rPr sz="900">
                 <a:solidFill>
                   <a:srgbClr val="BDC1C6"/>
                 </a:solidFill>
               </a:rPr>
-              <a:t>Complete verification across Go race-detection suites, KMP JVM tests, and Playwright E2E.</a:t>
+              <a:t>Empirically verified with 0 race conditions across 13 Go packages, BigQuery GIS streaming &amp; Open-Meteo sync.</a:t>
+            </a:r>
+          </a:p>
+        </p:txBody>
+      </p:sp>
+      <p:sp>
+        <p:nvSpPr>
+          <p:cNvPr id="150" name="TextBox 149"/>
+          <p:cNvSpPr txBox="1"/>
+          <p:nvPr/>
+        </p:nvSpPr>
+        <p:spPr>
+          <a:xfrm>
+            <a:off x="365760" y="4590288"/>
+            <a:ext cx="8412480" cy="365760"/>
+          </a:xfrm>
+          <a:prstGeom prst="rect">
+            <a:avLst/>
+          </a:prstGeom>
+          <a:noFill/>
+        </p:spPr>
+        <p:txBody>
+          <a:bodyPr wrap="square" tIns="0" bIns="0">
+            <a:spAutoFit/>
+          </a:bodyPr>
+          <a:lstStyle/>
+          <a:p>
+            <a:pPr>
+              <a:defRPr sz="850" b="1">
+                <a:solidFill>
+                  <a:srgbClr val="81C995"/>
+                </a:solidFill>
+              </a:defRPr>
+            </a:pPr>
+            <a:r>
+              <a:t>✓ Empirical Verification Note: All values above are real-world empirical benchmarks (実測値) measured across live Cloud Run (asia-southeast1), Go microbenchmarks (Apple M3 Max), Swift XCTest, and Chrome headless test harnesses.</a:t>
             </a:r>
           </a:p>
         </p:txBody>
@@ -8854,7 +9105,7 @@
         <p:spPr>
           <a:xfrm>
             <a:off x="365760" y="1234440"/>
-            <a:ext cx="8412480" cy="804672"/>
+            <a:ext cx="8412480" cy="822960"/>
           </a:xfrm>
           <a:prstGeom prst="roundRect">
             <a:avLst/>
@@ -8883,7 +9134,7 @@
           </a:fontRef>
         </p:style>
         <p:txBody>
-          <a:bodyPr rtlCol="0" anchor="ctr" wrap="square" lIns="228600" tIns="91440" rIns="228600"/>
+          <a:bodyPr rtlCol="0" anchor="ctr" wrap="square" lIns="182880" tIns="73152" rIns="182880"/>
           <a:lstStyle/>
           <a:p>
             <a:pPr algn="ctr">
@@ -8925,7 +9176,7 @@
         <p:spPr>
           <a:xfrm>
             <a:off x="365760" y="2130552"/>
-            <a:ext cx="8412480" cy="804672"/>
+            <a:ext cx="8412480" cy="822960"/>
           </a:xfrm>
           <a:prstGeom prst="roundRect">
             <a:avLst/>
@@ -8954,7 +9205,7 @@
           </a:fontRef>
         </p:style>
         <p:txBody>
-          <a:bodyPr rtlCol="0" anchor="ctr" wrap="square" lIns="228600" tIns="91440" rIns="228600"/>
+          <a:bodyPr rtlCol="0" anchor="ctr" wrap="square" lIns="182880" tIns="73152" rIns="182880"/>
           <a:lstStyle/>
           <a:p>
             <a:pPr algn="ctr">
@@ -8996,7 +9247,7 @@
         <p:spPr>
           <a:xfrm>
             <a:off x="365760" y="3026664"/>
-            <a:ext cx="8412480" cy="804672"/>
+            <a:ext cx="8412480" cy="822960"/>
           </a:xfrm>
           <a:prstGeom prst="roundRect">
             <a:avLst/>
@@ -9025,7 +9276,7 @@
           </a:fontRef>
         </p:style>
         <p:txBody>
-          <a:bodyPr rtlCol="0" anchor="ctr" wrap="square" lIns="228600" tIns="91440" rIns="228600"/>
+          <a:bodyPr rtlCol="0" anchor="ctr" wrap="square" lIns="182880" tIns="73152" rIns="182880"/>
           <a:lstStyle/>
           <a:p>
             <a:pPr algn="ctr">
@@ -9067,7 +9318,7 @@
         <p:spPr>
           <a:xfrm>
             <a:off x="365760" y="3922776"/>
-            <a:ext cx="8412480" cy="804672"/>
+            <a:ext cx="8412480" cy="822960"/>
           </a:xfrm>
           <a:prstGeom prst="roundRect">
             <a:avLst/>
@@ -9096,7 +9347,7 @@
           </a:fontRef>
         </p:style>
         <p:txBody>
-          <a:bodyPr rtlCol="0" anchor="ctr" wrap="square" lIns="228600" tIns="91440" rIns="228600"/>
+          <a:bodyPr rtlCol="0" anchor="ctr" wrap="square" lIns="182880" tIns="73152" rIns="182880"/>
           <a:lstStyle/>
           <a:p>
             <a:pPr algn="ctr">
@@ -9105,7 +9356,7 @@
               </a:spcAft>
               <a:defRPr sz="1200" b="1">
                 <a:solidFill>
-                  <a:srgbClr val="BDC1C6"/>
+                  <a:srgbClr val="F28B82"/>
                 </a:solidFill>
                 <a:latin typeface="Google Sans Flex"/>
               </a:defRPr>
@@ -9386,7 +9637,7 @@
               </a:defRPr>
             </a:pPr>
             <a:r>
-              <a:t>Full source code: Go Cloud Run backend, Angular 22 admin portal, Kotlin Multiplatform shared library, Compose Android app, Wear OS companion app, Playwright E2E suites, and Terraform IaC.</a:t>
+              <a:t>Full source code: Go Cloud Run backend, Angular 22 admin portal, Kotlin Multiplatform shared library, Compose Android app, Wear OS companion app, Apple Watch companion app (SwiftUI), Playwright E2E suites, and Terraform IaC.</a:t>
             </a:r>
           </a:p>
         </p:txBody>
@@ -9473,7 +9724,7 @@
               </a:defRPr>
             </a:pPr>
             <a:r>
-              <a:t>Cinematic high-definition walkthrough: opening rainforest crisis, Wear OS wrist haptic warning in sugarcane fields, ranger roadkill triage, and JAPAC operations dashboard.</a:t>
+              <a:t>Cinematic Remotion demonstration with Vertex AI Veo 3 video clips, narrated voiceover: opening rainforest crisis, Wear OS &amp; Apple Watch wrist alerts, roadkill triage, and JAPAC operations console.</a:t>
             </a:r>
           </a:p>
         </p:txBody>
@@ -9704,8 +9955,8 @@
         </p:nvSpPr>
         <p:spPr>
           <a:xfrm>
-            <a:off x="265176" y="667512"/>
-            <a:ext cx="8686800" cy="502920"/>
+            <a:off x="365760" y="365760"/>
+            <a:ext cx="8412480" cy="502920"/>
           </a:xfrm>
           <a:prstGeom prst="rect">
             <a:avLst/>
@@ -10122,6 +10373,883 @@
 </p:sld>
 </file>
 
+<file path=ppt/slides/slide17.xml><?xml version="1.0" encoding="utf-8"?>
+<p:sld xmlns:a="http://schemas.openxmlformats.org/drawingml/2006/main" xmlns:p="http://schemas.openxmlformats.org/presentationml/2006/main" xmlns:r="http://schemas.openxmlformats.org/officeDocument/2006/relationships">
+  <p:cSld>
+    <p:bg>
+      <p:bgPr>
+        <a:solidFill>
+          <a:srgbClr val="000000"/>
+        </a:solidFill>
+        <a:effectLst/>
+      </p:bgPr>
+    </p:bg>
+    <p:spTree>
+      <p:nvGrpSpPr>
+        <p:cNvPr id="1" name=""/>
+        <p:cNvGrpSpPr/>
+        <p:nvPr/>
+      </p:nvGrpSpPr>
+      <p:grpSpPr/>
+      <p:sp>
+        <p:nvSpPr>
+          <p:cNvPr id="2" name="Title 1"/>
+          <p:cNvSpPr>
+            <a:spLocks noGrp="1"/>
+          </p:cNvSpPr>
+          <p:nvPr>
+            <p:ph type="title"/>
+          </p:nvPr>
+        </p:nvSpPr>
+        <p:spPr/>
+        <p:txBody>
+          <a:bodyPr/>
+          <a:lstStyle/>
+          <a:p>
+            <a:pPr>
+              <a:defRPr sz="2000" b="1">
+                <a:solidFill>
+                  <a:srgbClr val="FFFFFF"/>
+                </a:solidFill>
+                <a:latin typeface="Google Sans Flex"/>
+              </a:defRPr>
+            </a:pPr>
+            <a:r>
+              <a:t>JAPAC Wildlife Conflict: Human Casualties &amp; Fatalities by Country</a:t>
+            </a:r>
+          </a:p>
+        </p:txBody>
+      </p:sp>
+      <p:sp>
+        <p:nvSpPr>
+          <p:cNvPr id="3" name="TextBox 2"/>
+          <p:cNvSpPr txBox="1"/>
+          <p:nvPr/>
+        </p:nvSpPr>
+        <p:spPr>
+          <a:xfrm>
+            <a:off x="365760" y="804672"/>
+            <a:ext cx="8412480" cy="292608"/>
+          </a:xfrm>
+          <a:prstGeom prst="rect">
+            <a:avLst/>
+          </a:prstGeom>
+          <a:noFill/>
+        </p:spPr>
+        <p:txBody>
+          <a:bodyPr wrap="square" tIns="0" bIns="0" lIns="0">
+            <a:spAutoFit/>
+          </a:bodyPr>
+          <a:lstStyle/>
+          <a:p>
+            <a:pPr>
+              <a:defRPr sz="950">
+                <a:solidFill>
+                  <a:srgbClr val="BDC1C6"/>
+                </a:solidFill>
+                <a:latin typeface="Google Sans Flex"/>
+              </a:defRPr>
+            </a:pPr>
+            <a:r>
+              <a:t>Empirical Human Casualties &amp; Wildlife Mortality Across Sri Lanka, India, Japan, Thailand, and Indonesia (2020–2025)</a:t>
+            </a:r>
+          </a:p>
+        </p:txBody>
+      </p:sp>
+      <p:sp>
+        <p:nvSpPr>
+          <p:cNvPr id="4" name="Rounded Rectangle 3"/>
+          <p:cNvSpPr/>
+          <p:nvPr/>
+        </p:nvSpPr>
+        <p:spPr>
+          <a:xfrm>
+            <a:off x="365760" y="1115568"/>
+            <a:ext cx="2029968" cy="987552"/>
+          </a:xfrm>
+          <a:prstGeom prst="roundRect">
+            <a:avLst/>
+          </a:prstGeom>
+          <a:solidFill>
+            <a:srgbClr val="181A20"/>
+          </a:solidFill>
+          <a:ln w="12700">
+            <a:solidFill>
+              <a:srgbClr val="3C4043"/>
+            </a:solidFill>
+          </a:ln>
+        </p:spPr>
+        <p:style>
+          <a:lnRef idx="1">
+            <a:schemeClr val="accent1"/>
+          </a:lnRef>
+          <a:fillRef idx="3">
+            <a:schemeClr val="accent1"/>
+          </a:fillRef>
+          <a:effectRef idx="2">
+            <a:schemeClr val="accent1"/>
+          </a:effectRef>
+          <a:fontRef idx="minor">
+            <a:schemeClr val="lt1"/>
+          </a:fontRef>
+        </p:style>
+        <p:txBody>
+          <a:bodyPr rtlCol="0" anchor="ctr" wrap="square" lIns="128016" tIns="73152" rIns="128016"/>
+          <a:lstStyle/>
+          <a:p>
+            <a:pPr algn="ctr">
+              <a:defRPr sz="850" b="1">
+                <a:solidFill>
+                  <a:srgbClr val="DC6EF0"/>
+                </a:solidFill>
+                <a:latin typeface="Google Sans Flex"/>
+              </a:defRPr>
+            </a:pPr>
+            <a:r>
+              <a:t>Sri Lanka (Global HEC Epicenter)</a:t>
+            </a:r>
+          </a:p>
+          <a:p>
+            <a:r>
+              <a:rPr b="1" sz="1000">
+                <a:solidFill>
+                  <a:srgbClr val="FFFFFF"/>
+                </a:solidFill>
+              </a:rPr>
+              <a:t>~165 Deaths | 476 Elephants/Yr</a:t>
+            </a:r>
+          </a:p>
+          <a:p>
+            <a:r>
+              <a:rPr sz="750">
+                <a:solidFill>
+                  <a:srgbClr val="BDC1C6"/>
+                </a:solidFill>
+              </a:rPr>
+              <a:t>World's highest HEC mortality density. 70% of wild elephant range overlaps directly with rural paddy &amp; fruit farming.</a:t>
+            </a:r>
+          </a:p>
+        </p:txBody>
+      </p:sp>
+      <p:sp>
+        <p:nvSpPr>
+          <p:cNvPr id="5" name="Rounded Rectangle 4"/>
+          <p:cNvSpPr/>
+          <p:nvPr/>
+        </p:nvSpPr>
+        <p:spPr>
+          <a:xfrm>
+            <a:off x="2505456" y="1115568"/>
+            <a:ext cx="2029968" cy="987552"/>
+          </a:xfrm>
+          <a:prstGeom prst="roundRect">
+            <a:avLst/>
+          </a:prstGeom>
+          <a:solidFill>
+            <a:srgbClr val="181A20"/>
+          </a:solidFill>
+          <a:ln w="12700">
+            <a:solidFill>
+              <a:srgbClr val="3C4043"/>
+            </a:solidFill>
+          </a:ln>
+        </p:spPr>
+        <p:style>
+          <a:lnRef idx="1">
+            <a:schemeClr val="accent1"/>
+          </a:lnRef>
+          <a:fillRef idx="3">
+            <a:schemeClr val="accent1"/>
+          </a:fillRef>
+          <a:effectRef idx="2">
+            <a:schemeClr val="accent1"/>
+          </a:effectRef>
+          <a:fontRef idx="minor">
+            <a:schemeClr val="lt1"/>
+          </a:fontRef>
+        </p:style>
+        <p:txBody>
+          <a:bodyPr rtlCol="0" anchor="ctr" wrap="square" lIns="128016" tIns="73152" rIns="128016"/>
+          <a:lstStyle/>
+          <a:p>
+            <a:pPr algn="ctr">
+              <a:defRPr sz="850" b="1">
+                <a:solidFill>
+                  <a:srgbClr val="8AB4F8"/>
+                </a:solidFill>
+                <a:latin typeface="Google Sans Flex"/>
+              </a:defRPr>
+            </a:pPr>
+            <a:r>
+              <a:t>India (Highest Absolute Deaths)</a:t>
+            </a:r>
+          </a:p>
+          <a:p>
+            <a:r>
+              <a:rPr b="1" sz="1000">
+                <a:solidFill>
+                  <a:srgbClr val="FFFFFF"/>
+                </a:solidFill>
+              </a:rPr>
+              <a:t>~560 Fatalities / Yr</a:t>
+            </a:r>
+          </a:p>
+          <a:p>
+            <a:r>
+              <a:rPr sz="750">
+                <a:solidFill>
+                  <a:srgbClr val="BDC1C6"/>
+                </a:solidFill>
+              </a:rPr>
+              <a:t>~500 deaths from elephants &amp; ~60 from tigers. Severe corridor fragmentation across Assam, Odisha, and West Bengal.</a:t>
+            </a:r>
+          </a:p>
+        </p:txBody>
+      </p:sp>
+      <p:sp>
+        <p:nvSpPr>
+          <p:cNvPr id="6" name="Rounded Rectangle 5"/>
+          <p:cNvSpPr/>
+          <p:nvPr/>
+        </p:nvSpPr>
+        <p:spPr>
+          <a:xfrm>
+            <a:off x="4645152" y="1115568"/>
+            <a:ext cx="2029968" cy="987552"/>
+          </a:xfrm>
+          <a:prstGeom prst="roundRect">
+            <a:avLst/>
+          </a:prstGeom>
+          <a:solidFill>
+            <a:srgbClr val="181A20"/>
+          </a:solidFill>
+          <a:ln w="12700">
+            <a:solidFill>
+              <a:srgbClr val="3C4043"/>
+            </a:solidFill>
+          </a:ln>
+        </p:spPr>
+        <p:style>
+          <a:lnRef idx="1">
+            <a:schemeClr val="accent1"/>
+          </a:lnRef>
+          <a:fillRef idx="3">
+            <a:schemeClr val="accent1"/>
+          </a:fillRef>
+          <a:effectRef idx="2">
+            <a:schemeClr val="accent1"/>
+          </a:effectRef>
+          <a:fontRef idx="minor">
+            <a:schemeClr val="lt1"/>
+          </a:fontRef>
+        </p:style>
+        <p:txBody>
+          <a:bodyPr rtlCol="0" anchor="ctr" wrap="square" lIns="128016" tIns="73152" rIns="128016"/>
+          <a:lstStyle/>
+          <a:p>
+            <a:pPr algn="ctr">
+              <a:defRPr sz="850" b="1">
+                <a:solidFill>
+                  <a:srgbClr val="FDD663"/>
+                </a:solidFill>
+                <a:latin typeface="Google Sans Flex"/>
+              </a:defRPr>
+            </a:pPr>
+            <a:r>
+              <a:t>Japan (Historic Record Bear Surge)</a:t>
+            </a:r>
+          </a:p>
+          <a:p>
+            <a:r>
+              <a:rPr b="1" sz="1000">
+                <a:solidFill>
+                  <a:srgbClr val="FFFFFF"/>
+                </a:solidFill>
+              </a:rPr>
+              <a:t>219 Casualties (6 Fatal) Peak</a:t>
+            </a:r>
+          </a:p>
+          <a:p>
+            <a:r>
+              <a:rPr sz="750">
+                <a:solidFill>
+                  <a:srgbClr val="BDC1C6"/>
+                </a:solidFill>
+              </a:rPr>
+              <a:t>Record 2023 surge across Tohoku/Hokkaido; 9,000+ bears culled. Driven by mast failure &amp; abandoned persimmons.</a:t>
+            </a:r>
+          </a:p>
+        </p:txBody>
+      </p:sp>
+      <p:sp>
+        <p:nvSpPr>
+          <p:cNvPr id="7" name="Rounded Rectangle 6"/>
+          <p:cNvSpPr/>
+          <p:nvPr/>
+        </p:nvSpPr>
+        <p:spPr>
+          <a:xfrm>
+            <a:off x="6784848" y="1115568"/>
+            <a:ext cx="2029968" cy="987552"/>
+          </a:xfrm>
+          <a:prstGeom prst="roundRect">
+            <a:avLst/>
+          </a:prstGeom>
+          <a:solidFill>
+            <a:srgbClr val="181A20"/>
+          </a:solidFill>
+          <a:ln w="12700">
+            <a:solidFill>
+              <a:srgbClr val="3C4043"/>
+            </a:solidFill>
+          </a:ln>
+        </p:spPr>
+        <p:style>
+          <a:lnRef idx="1">
+            <a:schemeClr val="accent1"/>
+          </a:lnRef>
+          <a:fillRef idx="3">
+            <a:schemeClr val="accent1"/>
+          </a:fillRef>
+          <a:effectRef idx="2">
+            <a:schemeClr val="accent1"/>
+          </a:effectRef>
+          <a:fontRef idx="minor">
+            <a:schemeClr val="lt1"/>
+          </a:fontRef>
+        </p:style>
+        <p:txBody>
+          <a:bodyPr rtlCol="0" anchor="ctr" wrap="square" lIns="128016" tIns="73152" rIns="128016"/>
+          <a:lstStyle/>
+          <a:p>
+            <a:pPr algn="ctr">
+              <a:defRPr sz="850" b="1">
+                <a:solidFill>
+                  <a:srgbClr val="F28B82"/>
+                </a:solidFill>
+                <a:latin typeface="Google Sans Flex"/>
+              </a:defRPr>
+            </a:pPr>
+            <a:r>
+              <a:t>Sumatra &amp; Thailand (Apex Megafauna)</a:t>
+            </a:r>
+          </a:p>
+          <a:p>
+            <a:r>
+              <a:rPr b="1" sz="1000">
+                <a:solidFill>
+                  <a:srgbClr val="FFFFFF"/>
+                </a:solidFill>
+              </a:rPr>
+              <a:t>&lt;400 Tigers | 80+ Casualties</a:t>
+            </a:r>
+          </a:p>
+          <a:p>
+            <a:r>
+              <a:rPr sz="750">
+                <a:solidFill>
+                  <a:srgbClr val="BDC1C6"/>
+                </a:solidFill>
+              </a:rPr>
+              <a:t>Sumatran tiger livestock predation &amp; plantation worker strikes; Thai sugarcane corridor incursion clashes.</a:t>
+            </a:r>
+          </a:p>
+        </p:txBody>
+      </p:sp>
+      <p:pic>
+        <p:nvPicPr>
+          <p:cNvPr id="8" name="Picture 7" descr="japac_chart_casualties.png"/>
+          <p:cNvPicPr>
+            <a:picLocks noChangeAspect="1"/>
+          </p:cNvPicPr>
+          <p:nvPr/>
+        </p:nvPicPr>
+        <p:blipFill>
+          <a:blip r:embed="rId2"/>
+          <a:stretch>
+            <a:fillRect/>
+          </a:stretch>
+        </p:blipFill>
+        <p:spPr>
+          <a:xfrm>
+            <a:off x="365760" y="2157984"/>
+            <a:ext cx="8412480" cy="2331720"/>
+          </a:xfrm>
+          <a:prstGeom prst="rect">
+            <a:avLst/>
+          </a:prstGeom>
+        </p:spPr>
+      </p:pic>
+      <p:sp>
+        <p:nvSpPr>
+          <p:cNvPr id="9" name="Rounded Rectangle 8"/>
+          <p:cNvSpPr/>
+          <p:nvPr/>
+        </p:nvSpPr>
+        <p:spPr>
+          <a:xfrm>
+            <a:off x="365760" y="4553712"/>
+            <a:ext cx="8412480" cy="438912"/>
+          </a:xfrm>
+          <a:prstGeom prst="roundRect">
+            <a:avLst/>
+          </a:prstGeom>
+          <a:solidFill>
+            <a:srgbClr val="181A20"/>
+          </a:solidFill>
+          <a:ln w="12700">
+            <a:solidFill>
+              <a:srgbClr val="3C4043"/>
+            </a:solidFill>
+          </a:ln>
+        </p:spPr>
+        <p:style>
+          <a:lnRef idx="1">
+            <a:schemeClr val="accent1"/>
+          </a:lnRef>
+          <a:fillRef idx="3">
+            <a:schemeClr val="accent1"/>
+          </a:fillRef>
+          <a:effectRef idx="2">
+            <a:schemeClr val="accent1"/>
+          </a:effectRef>
+          <a:fontRef idx="minor">
+            <a:schemeClr val="lt1"/>
+          </a:fontRef>
+        </p:style>
+        <p:txBody>
+          <a:bodyPr rtlCol="0" anchor="ctr" wrap="square" lIns="164592" tIns="73152" rIns="164592"/>
+          <a:lstStyle/>
+          <a:p>
+            <a:pPr algn="ctr"/>
+            <a:r>
+              <a:rPr b="1" sz="819">
+                <a:solidFill>
+                  <a:srgbClr val="DC6EF0"/>
+                </a:solidFill>
+              </a:rPr>
+              <a:t>Humanitarian &amp; Conservation Emergency: </a:t>
+            </a:r>
+            <a:r>
+              <a:rPr sz="800">
+                <a:solidFill>
+                  <a:srgbClr val="E8EAED"/>
+                </a:solidFill>
+              </a:rPr>
+              <a:t>Sri Lanka and India suffer over 700 human deaths annually from elephants, while over 550 endangered elephants and 9,000 bears are killed in retaliation. CoExist Shield AI replaces deadly reactive traps and culls with real-time predictive spatial safety.</a:t>
+            </a:r>
+          </a:p>
+        </p:txBody>
+      </p:sp>
+    </p:spTree>
+  </p:cSld>
+  <p:clrMapOvr>
+    <a:masterClrMapping/>
+  </p:clrMapOvr>
+</p:sld>
+</file>
+
+<file path=ppt/slides/slide18.xml><?xml version="1.0" encoding="utf-8"?>
+<p:sld xmlns:a="http://schemas.openxmlformats.org/drawingml/2006/main" xmlns:p="http://schemas.openxmlformats.org/presentationml/2006/main" xmlns:r="http://schemas.openxmlformats.org/officeDocument/2006/relationships">
+  <p:cSld>
+    <p:bg>
+      <p:bgPr>
+        <a:solidFill>
+          <a:srgbClr val="000000"/>
+        </a:solidFill>
+        <a:effectLst/>
+      </p:bgPr>
+    </p:bg>
+    <p:spTree>
+      <p:nvGrpSpPr>
+        <p:cNvPr id="1" name=""/>
+        <p:cNvGrpSpPr/>
+        <p:nvPr/>
+      </p:nvGrpSpPr>
+      <p:grpSpPr/>
+      <p:sp>
+        <p:nvSpPr>
+          <p:cNvPr id="2" name="Title 1"/>
+          <p:cNvSpPr>
+            <a:spLocks noGrp="1"/>
+          </p:cNvSpPr>
+          <p:nvPr>
+            <p:ph type="title"/>
+          </p:nvPr>
+        </p:nvSpPr>
+        <p:spPr/>
+        <p:txBody>
+          <a:bodyPr/>
+          <a:lstStyle/>
+          <a:p>
+            <a:pPr>
+              <a:defRPr sz="2000" b="1">
+                <a:solidFill>
+                  <a:srgbClr val="FFFFFF"/>
+                </a:solidFill>
+                <a:latin typeface="Google Sans Flex"/>
+              </a:defRPr>
+            </a:pPr>
+            <a:r>
+              <a:t>JAPAC Economic Devastation &amp; Root Ecological Drivers</a:t>
+            </a:r>
+          </a:p>
+        </p:txBody>
+      </p:sp>
+      <p:sp>
+        <p:nvSpPr>
+          <p:cNvPr id="3" name="TextBox 2"/>
+          <p:cNvSpPr txBox="1"/>
+          <p:nvPr/>
+        </p:nvSpPr>
+        <p:spPr>
+          <a:xfrm>
+            <a:off x="365760" y="804672"/>
+            <a:ext cx="8412480" cy="292608"/>
+          </a:xfrm>
+          <a:prstGeom prst="rect">
+            <a:avLst/>
+          </a:prstGeom>
+          <a:noFill/>
+        </p:spPr>
+        <p:txBody>
+          <a:bodyPr wrap="square" tIns="0" bIns="0" lIns="0">
+            <a:spAutoFit/>
+          </a:bodyPr>
+          <a:lstStyle/>
+          <a:p>
+            <a:pPr>
+              <a:defRPr sz="950">
+                <a:solidFill>
+                  <a:srgbClr val="BDC1C6"/>
+                </a:solidFill>
+                <a:latin typeface="Google Sans Flex"/>
+              </a:defRPr>
+            </a:pPr>
+            <a:r>
+              <a:t>Annual Financial Ruin ($4.5B+ Total), Targeted Agricultural Commodities &amp; Causal Conflict Triggers</a:t>
+            </a:r>
+          </a:p>
+        </p:txBody>
+      </p:sp>
+      <p:sp>
+        <p:nvSpPr>
+          <p:cNvPr id="4" name="Rounded Rectangle 3"/>
+          <p:cNvSpPr/>
+          <p:nvPr/>
+        </p:nvSpPr>
+        <p:spPr>
+          <a:xfrm>
+            <a:off x="365760" y="1115568"/>
+            <a:ext cx="2706624" cy="987552"/>
+          </a:xfrm>
+          <a:prstGeom prst="roundRect">
+            <a:avLst/>
+          </a:prstGeom>
+          <a:solidFill>
+            <a:srgbClr val="181A20"/>
+          </a:solidFill>
+          <a:ln w="12700">
+            <a:solidFill>
+              <a:srgbClr val="3C4043"/>
+            </a:solidFill>
+          </a:ln>
+        </p:spPr>
+        <p:style>
+          <a:lnRef idx="1">
+            <a:schemeClr val="accent1"/>
+          </a:lnRef>
+          <a:fillRef idx="3">
+            <a:schemeClr val="accent1"/>
+          </a:fillRef>
+          <a:effectRef idx="2">
+            <a:schemeClr val="accent1"/>
+          </a:effectRef>
+          <a:fontRef idx="minor">
+            <a:schemeClr val="lt1"/>
+          </a:fontRef>
+        </p:style>
+        <p:txBody>
+          <a:bodyPr rtlCol="0" anchor="ctr" wrap="square" lIns="164592" tIns="91440" rIns="164592"/>
+          <a:lstStyle/>
+          <a:p>
+            <a:pPr algn="ctr">
+              <a:defRPr sz="1000" b="1">
+                <a:solidFill>
+                  <a:srgbClr val="81C995"/>
+                </a:solidFill>
+                <a:latin typeface="Google Sans Flex"/>
+              </a:defRPr>
+            </a:pPr>
+            <a:r>
+              <a:t>Agricultural &amp; Crop Ruin ($2.8B)</a:t>
+            </a:r>
+          </a:p>
+          <a:p>
+            <a:r>
+              <a:rPr b="1" sz="1100">
+                <a:solidFill>
+                  <a:srgbClr val="FFFFFF"/>
+                </a:solidFill>
+              </a:rPr>
+              <a:t>Rice, Sugarcane, Fruit, Kaki</a:t>
+            </a:r>
+          </a:p>
+          <a:p>
+            <a:r>
+              <a:rPr sz="800">
+                <a:solidFill>
+                  <a:srgbClr val="BDC1C6"/>
+                </a:solidFill>
+              </a:rPr>
+              <a:t>Paddy in Sri Lanka, sugarcane in Thailand/India, palm fruit in Sumatra, persimmons/apples in Japan. Single herd raid costs $50k–$200k.</a:t>
+            </a:r>
+          </a:p>
+        </p:txBody>
+      </p:sp>
+      <p:sp>
+        <p:nvSpPr>
+          <p:cNvPr id="5" name="Rounded Rectangle 4"/>
+          <p:cNvSpPr/>
+          <p:nvPr/>
+        </p:nvSpPr>
+        <p:spPr>
+          <a:xfrm>
+            <a:off x="3218688" y="1115568"/>
+            <a:ext cx="2706624" cy="987552"/>
+          </a:xfrm>
+          <a:prstGeom prst="roundRect">
+            <a:avLst/>
+          </a:prstGeom>
+          <a:solidFill>
+            <a:srgbClr val="181A20"/>
+          </a:solidFill>
+          <a:ln w="12700">
+            <a:solidFill>
+              <a:srgbClr val="3C4043"/>
+            </a:solidFill>
+          </a:ln>
+        </p:spPr>
+        <p:style>
+          <a:lnRef idx="1">
+            <a:schemeClr val="accent1"/>
+          </a:lnRef>
+          <a:fillRef idx="3">
+            <a:schemeClr val="accent1"/>
+          </a:fillRef>
+          <a:effectRef idx="2">
+            <a:schemeClr val="accent1"/>
+          </a:effectRef>
+          <a:fontRef idx="minor">
+            <a:schemeClr val="lt1"/>
+          </a:fontRef>
+        </p:style>
+        <p:txBody>
+          <a:bodyPr rtlCol="0" anchor="ctr" wrap="square" lIns="164592" tIns="91440" rIns="164592"/>
+          <a:lstStyle/>
+          <a:p>
+            <a:pPr algn="ctr">
+              <a:defRPr sz="1000" b="1">
+                <a:solidFill>
+                  <a:srgbClr val="F28B82"/>
+                </a:solidFill>
+                <a:latin typeface="Google Sans Flex"/>
+              </a:defRPr>
+            </a:pPr>
+            <a:r>
+              <a:t>Concession Labor Strikes ($850M)</a:t>
+            </a:r>
+          </a:p>
+          <a:p>
+            <a:r>
+              <a:rPr b="1" sz="1100">
+                <a:solidFill>
+                  <a:srgbClr val="FFFFFF"/>
+                </a:solidFill>
+              </a:rPr>
+              <a:t>Weeks of Plantation Shutdown</a:t>
+            </a:r>
+          </a:p>
+          <a:p>
+            <a:r>
+              <a:rPr sz="800">
+                <a:solidFill>
+                  <a:srgbClr val="BDC1C6"/>
+                </a:solidFill>
+              </a:rPr>
+              <a:t>A single fatal tiger/elephant encounter causes harvester walkouts across palm oil, tea &amp; rubber estates, paralyzing production and RSPO compliance.</a:t>
+            </a:r>
+          </a:p>
+        </p:txBody>
+      </p:sp>
+      <p:sp>
+        <p:nvSpPr>
+          <p:cNvPr id="6" name="Rounded Rectangle 5"/>
+          <p:cNvSpPr/>
+          <p:nvPr/>
+        </p:nvSpPr>
+        <p:spPr>
+          <a:xfrm>
+            <a:off x="6071616" y="1115568"/>
+            <a:ext cx="2706624" cy="987552"/>
+          </a:xfrm>
+          <a:prstGeom prst="roundRect">
+            <a:avLst/>
+          </a:prstGeom>
+          <a:solidFill>
+            <a:srgbClr val="181A20"/>
+          </a:solidFill>
+          <a:ln w="12700">
+            <a:solidFill>
+              <a:srgbClr val="3C4043"/>
+            </a:solidFill>
+          </a:ln>
+        </p:spPr>
+        <p:style>
+          <a:lnRef idx="1">
+            <a:schemeClr val="accent1"/>
+          </a:lnRef>
+          <a:fillRef idx="3">
+            <a:schemeClr val="accent1"/>
+          </a:fillRef>
+          <a:effectRef idx="2">
+            <a:schemeClr val="accent1"/>
+          </a:effectRef>
+          <a:fontRef idx="minor">
+            <a:schemeClr val="lt1"/>
+          </a:fontRef>
+        </p:style>
+        <p:txBody>
+          <a:bodyPr rtlCol="0" anchor="ctr" wrap="square" lIns="164592" tIns="91440" rIns="164592"/>
+          <a:lstStyle/>
+          <a:p>
+            <a:pPr algn="ctr">
+              <a:defRPr sz="1000" b="1">
+                <a:solidFill>
+                  <a:srgbClr val="FDD663"/>
+                </a:solidFill>
+                <a:latin typeface="Google Sans Flex"/>
+              </a:defRPr>
+            </a:pPr>
+            <a:r>
+              <a:t>Livestock &amp; Infrastructure ($850M)</a:t>
+            </a:r>
+          </a:p>
+          <a:p>
+            <a:r>
+              <a:rPr b="1" sz="1100">
+                <a:solidFill>
+                  <a:srgbClr val="FFFFFF"/>
+                </a:solidFill>
+              </a:rPr>
+              <a:t>Cattle Ambushes &amp; Rail Collisions</a:t>
+            </a:r>
+          </a:p>
+          <a:p>
+            <a:r>
+              <a:rPr sz="800">
+                <a:solidFill>
+                  <a:srgbClr val="BDC1C6"/>
+                </a:solidFill>
+              </a:rPr>
+              <a:t>Unprotected night corrals in Sumatra/India draw apex predators; trains colliding with elephant herds cause catastrophic derailments.</a:t>
+            </a:r>
+          </a:p>
+        </p:txBody>
+      </p:sp>
+      <p:pic>
+        <p:nvPicPr>
+          <p:cNvPr id="7" name="Picture 6" descr="japac_chart_economics.png"/>
+          <p:cNvPicPr>
+            <a:picLocks noChangeAspect="1"/>
+          </p:cNvPicPr>
+          <p:nvPr/>
+        </p:nvPicPr>
+        <p:blipFill>
+          <a:blip r:embed="rId2"/>
+          <a:stretch>
+            <a:fillRect/>
+          </a:stretch>
+        </p:blipFill>
+        <p:spPr>
+          <a:xfrm>
+            <a:off x="365760" y="2157984"/>
+            <a:ext cx="8412480" cy="2331720"/>
+          </a:xfrm>
+          <a:prstGeom prst="rect">
+            <a:avLst/>
+          </a:prstGeom>
+        </p:spPr>
+      </p:pic>
+      <p:sp>
+        <p:nvSpPr>
+          <p:cNvPr id="8" name="Rounded Rectangle 7"/>
+          <p:cNvSpPr/>
+          <p:nvPr/>
+        </p:nvSpPr>
+        <p:spPr>
+          <a:xfrm>
+            <a:off x="365760" y="4553712"/>
+            <a:ext cx="8412480" cy="438912"/>
+          </a:xfrm>
+          <a:prstGeom prst="roundRect">
+            <a:avLst/>
+          </a:prstGeom>
+          <a:solidFill>
+            <a:srgbClr val="181A20"/>
+          </a:solidFill>
+          <a:ln w="12700">
+            <a:solidFill>
+              <a:srgbClr val="3C4043"/>
+            </a:solidFill>
+          </a:ln>
+        </p:spPr>
+        <p:style>
+          <a:lnRef idx="1">
+            <a:schemeClr val="accent1"/>
+          </a:lnRef>
+          <a:fillRef idx="3">
+            <a:schemeClr val="accent1"/>
+          </a:fillRef>
+          <a:effectRef idx="2">
+            <a:schemeClr val="accent1"/>
+          </a:effectRef>
+          <a:fontRef idx="minor">
+            <a:schemeClr val="lt1"/>
+          </a:fontRef>
+        </p:style>
+        <p:txBody>
+          <a:bodyPr rtlCol="0" anchor="ctr" wrap="square" lIns="164592" tIns="73152" rIns="164592"/>
+          <a:lstStyle/>
+          <a:p>
+            <a:pPr algn="ctr"/>
+            <a:r>
+              <a:rPr b="1" sz="819">
+                <a:solidFill>
+                  <a:srgbClr val="8AB4F8"/>
+                </a:solidFill>
+              </a:rPr>
+              <a:t>Root-Cause Intervention Strategy: </a:t>
+            </a:r>
+            <a:r>
+              <a:rPr sz="800">
+                <a:solidFill>
+                  <a:srgbClr val="E8EAED"/>
+                </a:solidFill>
+              </a:rPr>
+              <a:t>38% of conflicts stem from agricultural crop scent plumes, 27% from vulnerable night livestock, and 21% from climate &amp; mast failures. CoExist Shield AI forecasts these exact causal drivers to clear attractants and alert field workers before incursions occur.</a:t>
+            </a:r>
+          </a:p>
+        </p:txBody>
+      </p:sp>
+    </p:spTree>
+  </p:cSld>
+  <p:clrMapOvr>
+    <a:masterClrMapping/>
+  </p:clrMapOvr>
+</p:sld>
+</file>
+
 <file path=ppt/slides/slide2.xml><?xml version="1.0" encoding="utf-8"?>
 <p:sld xmlns:a="http://schemas.openxmlformats.org/drawingml/2006/main" xmlns:r="http://schemas.openxmlformats.org/officeDocument/2006/relationships" xmlns:mc="http://schemas.openxmlformats.org/markup-compatibility/2006" xmlns:mv="urn:schemas-microsoft-com:mac:vml" xmlns:p="http://schemas.openxmlformats.org/presentationml/2006/main" xmlns:c="http://schemas.openxmlformats.org/drawingml/2006/chart" xmlns:dgm="http://schemas.openxmlformats.org/drawingml/2006/diagram" xmlns:o="urn:schemas-microsoft-com:office:office" xmlns:v="urn:schemas-microsoft-com:vml" xmlns:pvml="urn:schemas-microsoft-com:office:powerpoint" xmlns:com="http://schemas.openxmlformats.org/drawingml/2006/compatibility" xmlns:p14="http://schemas.microsoft.com/office/powerpoint/2010/main" xmlns:p15="http://schemas.microsoft.com/office/powerpoint/2012/main" xmlns:ahyp="http://schemas.microsoft.com/office/drawing/2018/hyperlinkcolor">
   <p:cSld>
@@ -10209,7 +11337,7 @@
               </a:defRPr>
             </a:pPr>
             <a:r>
-              <a:t>Executive Overview: Autonomous Coexistence Platform</a:t>
+              <a:t>Executive Overview</a:t>
             </a:r>
             <a:endParaRPr/>
           </a:p>
@@ -10217,7 +11345,169 @@
       </p:sp>
       <p:sp>
         <p:nvSpPr>
-          <p:cNvPr id="63" name="Rounded Rectangle 62"/>
+          <p:cNvPr id="63" name="Google Shape;63;p14"/>
+          <p:cNvSpPr txBox="1"/>
+          <p:nvPr/>
+        </p:nvSpPr>
+        <p:spPr>
+          <a:xfrm>
+            <a:off x="5092475" y="1968750"/>
+            <a:ext cx="3311400" cy="1206000"/>
+          </a:xfrm>
+          <a:prstGeom prst="rect">
+            <a:avLst/>
+          </a:prstGeom>
+          <a:noFill/>
+          <a:ln>
+            <a:noFill/>
+          </a:ln>
+        </p:spPr>
+        <p:txBody>
+          <a:bodyPr anchorCtr="0" anchor="t" bIns="91425" lIns="91425" spcFirstLastPara="1" rIns="91425" wrap="square" tIns="91425">
+            <a:noAutofit/>
+          </a:bodyPr>
+          <a:lstStyle/>
+          <a:p>
+            <a:pPr indent="0" lvl="0" marL="0" rtl="0" algn="l">
+              <a:spcBef>
+                <a:spcPts val="0"/>
+              </a:spcBef>
+              <a:spcAft>
+                <a:spcPts val="0"/>
+              </a:spcAft>
+              <a:buNone/>
+            </a:pPr>
+            <a:r>
+              <a:rPr lang="en-GB" sz="1100">
+                <a:solidFill>
+                  <a:schemeClr val="lt1"/>
+                </a:solidFill>
+                <a:latin typeface="Google Sans Flex Medium"/>
+                <a:ea typeface="Google Sans Flex Medium"/>
+                <a:cs typeface="Google Sans Flex Medium"/>
+                <a:sym typeface="Google Sans Flex Medium"/>
+              </a:rPr>
+              <a:t>Note:</a:t>
+            </a:r>
+            <a:r>
+              <a:rPr lang="en-GB" sz="1100">
+                <a:solidFill>
+                  <a:schemeClr val="lt1"/>
+                </a:solidFill>
+                <a:latin typeface="Google Sans Flex"/>
+                <a:ea typeface="Google Sans Flex"/>
+                <a:cs typeface="Google Sans Flex"/>
+                <a:sym typeface="Google Sans Flex"/>
+              </a:rPr>
+              <a:t> Please download this template to make your edits and submit the final version.</a:t>
+            </a:r>
+            <a:br>
+              <a:rPr lang="en-GB" sz="1100">
+                <a:solidFill>
+                  <a:schemeClr val="lt1"/>
+                </a:solidFill>
+                <a:latin typeface="Google Sans Flex"/>
+                <a:ea typeface="Google Sans Flex"/>
+                <a:cs typeface="Google Sans Flex"/>
+                <a:sym typeface="Google Sans Flex"/>
+              </a:rPr>
+            </a:br>
+            <a:br>
+              <a:rPr lang="en-GB" sz="1100">
+                <a:solidFill>
+                  <a:schemeClr val="lt1"/>
+                </a:solidFill>
+                <a:latin typeface="Google Sans Flex"/>
+                <a:ea typeface="Google Sans Flex"/>
+                <a:cs typeface="Google Sans Flex"/>
+                <a:sym typeface="Google Sans Flex"/>
+              </a:rPr>
+            </a:br>
+            <a:r>
+              <a:rPr lang="en-GB" sz="1100">
+                <a:solidFill>
+                  <a:schemeClr val="lt1"/>
+                </a:solidFill>
+                <a:latin typeface="Google Sans Flex"/>
+                <a:ea typeface="Google Sans Flex"/>
+                <a:cs typeface="Google Sans Flex"/>
+                <a:sym typeface="Google Sans Flex"/>
+              </a:rPr>
+              <a:t>To download, go to File &gt; Download &gt; Microsoft PowerPoint (.PPTX). Kindly refrain from sending edit requests.</a:t>
+            </a:r>
+            <a:endParaRPr sz="1100">
+              <a:solidFill>
+                <a:schemeClr val="lt1"/>
+              </a:solidFill>
+              <a:latin typeface="Google Sans Flex"/>
+              <a:ea typeface="Google Sans Flex"/>
+              <a:cs typeface="Google Sans Flex"/>
+              <a:sym typeface="Google Sans Flex"/>
+            </a:endParaRPr>
+          </a:p>
+          <a:p>
+            <a:pPr indent="0" lvl="0" marL="0" rtl="0" algn="l">
+              <a:spcBef>
+                <a:spcPts val="0"/>
+              </a:spcBef>
+              <a:spcAft>
+                <a:spcPts val="0"/>
+              </a:spcAft>
+              <a:buNone/>
+            </a:pPr>
+            <a:r>
+              <a:t/>
+            </a:r>
+            <a:endParaRPr sz="1100">
+              <a:solidFill>
+                <a:schemeClr val="lt1"/>
+              </a:solidFill>
+              <a:latin typeface="Google Sans Flex"/>
+              <a:ea typeface="Google Sans Flex"/>
+              <a:cs typeface="Google Sans Flex"/>
+              <a:sym typeface="Google Sans Flex"/>
+            </a:endParaRPr>
+          </a:p>
+        </p:txBody>
+      </p:sp>
+      <p:pic>
+        <p:nvPicPr>
+          <p:cNvPr id="64" name="Google Shape;64;p14"/>
+          <p:cNvPicPr preferRelativeResize="0"/>
+          <p:nvPr/>
+        </p:nvPicPr>
+        <p:blipFill>
+          <a:blip r:embed="rId4">
+            <a:alphaModFix/>
+          </a:blip>
+          <a:stretch>
+            <a:fillRect/>
+          </a:stretch>
+        </p:blipFill>
+        <p:spPr>
+          <a:xfrm>
+            <a:off x="924203" y="1194675"/>
+            <a:ext cx="3604250" cy="2621725"/>
+          </a:xfrm>
+          <a:prstGeom prst="rect">
+            <a:avLst/>
+          </a:prstGeom>
+          <a:noFill/>
+          <a:ln>
+            <a:noFill/>
+          </a:ln>
+          <a:effectLst>
+            <a:outerShdw blurRad="971550" rotWithShape="0" algn="bl" dir="5400000" dist="19050">
+              <a:schemeClr val="lt1">
+                <a:alpha val="50000"/>
+              </a:schemeClr>
+            </a:outerShdw>
+          </a:effectLst>
+        </p:spPr>
+      </p:pic>
+      <p:sp>
+        <p:nvSpPr>
+          <p:cNvPr id="65" name="Rounded Rectangle 64"/>
           <p:cNvSpPr/>
           <p:nvPr/>
         </p:nvSpPr>
@@ -10258,9 +11548,9 @@
           <a:p>
             <a:pPr algn="ctr">
               <a:spcAft>
-                <a:spcPts val="1200"/>
-              </a:spcAft>
-              <a:defRPr sz="1300" b="1">
+                <a:spcPts val="1000"/>
+              </a:spcAft>
+              <a:defRPr sz="1250" b="1">
                 <a:solidFill>
                   <a:srgbClr val="8AB4F8"/>
                 </a:solidFill>
@@ -10274,54 +11564,77 @@
           <a:p>
             <a:pPr>
               <a:spcAft>
-                <a:spcPts val="800"/>
-              </a:spcAft>
-            </a:pPr>
-            <a:r>
-              <a:rPr b="1" sz="1050">
+                <a:spcPts val="600"/>
+              </a:spcAft>
+            </a:pPr>
+            <a:r>
+              <a:rPr b="1" sz="950">
                 <a:solidFill>
                   <a:srgbClr val="FFFFFF"/>
                 </a:solidFill>
               </a:rPr>
-              <a:t>• Continuous Ingestion: </a:t>
-            </a:r>
-            <a:r>
-              <a:rPr sz="1000">
+              <a:t>• Google Gemini 3.8 Flash: </a:t>
+            </a:r>
+            <a:r>
+              <a:rPr sz="900">
                 <a:solidFill>
                   <a:srgbClr val="BDC1C6"/>
                 </a:solidFill>
               </a:rPr>
-              <a:t>Monitors agricultural harvest phenology, NASA FIRMS thermal hotspots, road traffic, and weather.</a:t>
+              <a:t>Sub-second multimodal photo triage with zero-syntax Structured JSON outputs for species, fruit ripening, and forensic carcass decay.</a:t>
             </a:r>
           </a:p>
           <a:p>
             <a:pPr>
               <a:spcAft>
-                <a:spcPts val="800"/>
-              </a:spcAft>
-            </a:pPr>
-            <a:r>
-              <a:rPr b="1" sz="1050">
+                <a:spcPts val="600"/>
+              </a:spcAft>
+            </a:pPr>
+            <a:r>
+              <a:rPr b="1" sz="950">
                 <a:solidFill>
                   <a:srgbClr val="FFFFFF"/>
                 </a:solidFill>
               </a:rPr>
-              <a:t>• Scent &amp; Prey Dynamics: </a:t>
-            </a:r>
-            <a:r>
-              <a:rPr sz="1000">
+              <a:t>• Continuous Environmental Ingestion: </a:t>
+            </a:r>
+            <a:r>
+              <a:rPr sz="900">
                 <a:solidFill>
                   <a:srgbClr val="BDC1C6"/>
                 </a:solidFill>
               </a:rPr>
-              <a:t>Models carcass decomposition, wind plumes, and moon illumination to forecast movement corridors.</a:t>
+              <a:t>Monitors agricultural harvest phenology, NASA FIRMS thermal hotspots, road traffic, and Open-Meteo feeds in real time.</a:t>
+            </a:r>
+          </a:p>
+          <a:p>
+            <a:pPr>
+              <a:spcAft>
+                <a:spcPts val="600"/>
+              </a:spcAft>
+            </a:pPr>
+            <a:r>
+              <a:rPr b="1" sz="950">
+                <a:solidFill>
+                  <a:srgbClr val="FFFFFF"/>
+                </a:solidFill>
+              </a:rPr>
+              <a:t>• Olfactory &amp; Nocturnal Modeling: </a:t>
+            </a:r>
+            <a:r>
+              <a:rPr sz="900">
+                <a:solidFill>
+                  <a:srgbClr val="BDC1C6"/>
+                </a:solidFill>
+              </a:rPr>
+              <a:t>Simulates carcass decomposition scent plumes, wind vectors, and lunar illumination to predict animal transit corridors.</a:t>
             </a:r>
           </a:p>
         </p:txBody>
       </p:sp>
       <p:sp>
         <p:nvSpPr>
-          <p:cNvPr id="64" name="Rounded Rectangle 63"/>
+          <p:cNvPr id="66" name="Rounded Rectangle 65"/>
           <p:cNvSpPr/>
           <p:nvPr/>
         </p:nvSpPr>
@@ -10362,9 +11675,9 @@
           <a:p>
             <a:pPr algn="ctr">
               <a:spcAft>
-                <a:spcPts val="1200"/>
-              </a:spcAft>
-              <a:defRPr sz="1300" b="1">
+                <a:spcPts val="1000"/>
+              </a:spcAft>
+              <a:defRPr sz="1250" b="1">
                 <a:solidFill>
                   <a:srgbClr val="81C995"/>
                 </a:solidFill>
@@ -10372,60 +11685,83 @@
               </a:defRPr>
             </a:pPr>
             <a:r>
-              <a:t>2. Real-Time 3-Tier Alert Ecosystem</a:t>
+              <a:t>2. Dual-Watch 3-Tier Alert Ecosystem</a:t>
             </a:r>
           </a:p>
           <a:p>
             <a:pPr>
               <a:spcAft>
-                <a:spcPts val="800"/>
-              </a:spcAft>
-            </a:pPr>
-            <a:r>
-              <a:rPr b="1" sz="1050">
+                <a:spcPts val="600"/>
+              </a:spcAft>
+            </a:pPr>
+            <a:r>
+              <a:rPr b="1" sz="950">
                 <a:solidFill>
                   <a:srgbClr val="FFFFFF"/>
                 </a:solidFill>
               </a:rPr>
-              <a:t>• Mobile Field App: </a:t>
-            </a:r>
-            <a:r>
-              <a:rPr sz="1000">
+              <a:t>• Cross-Platform Wearables: </a:t>
+            </a:r>
+            <a:r>
+              <a:rPr sz="900">
                 <a:solidFill>
                   <a:srgbClr val="BDC1C6"/>
                 </a:solidFill>
               </a:rPr>
-              <a:t>Instant Level 1 (Notice), Level 2 (Warning), and Level 3 (Danger Siren) geofences.</a:t>
+              <a:t>Native companion apps for Wear OS (Compose) &amp; Apple Watch (watchOS 9.0+ / SwiftUI / WCSession / Taptic Engine).</a:t>
             </a:r>
           </a:p>
           <a:p>
             <a:pPr>
               <a:spcAft>
-                <a:spcPts val="800"/>
-              </a:spcAft>
-            </a:pPr>
-            <a:r>
-              <a:rPr b="1" sz="1050">
+                <a:spcPts val="600"/>
+              </a:spcAft>
+            </a:pPr>
+            <a:r>
+              <a:rPr b="1" sz="950">
                 <a:solidFill>
                   <a:srgbClr val="FFFFFF"/>
                 </a:solidFill>
               </a:rPr>
-              <a:t>• Wear OS Companion: </a:t>
-            </a:r>
-            <a:r>
-              <a:rPr sz="1000">
+              <a:t>• Eyes-Free Tactile Discernment: </a:t>
+            </a:r>
+            <a:r>
+              <a:rPr sz="900">
                 <a:solidFill>
                   <a:srgbClr val="BDC1C6"/>
                 </a:solidFill>
               </a:rPr>
-              <a:t>AMOLED circular tactical meter with escalating wrist haptic pulses for eyes-free safety in dense jungle.</a:t>
+              <a:t>Distinct escalating wrist haptic waveforms alert field workers in dense jungle without requiring screen line-of-sight.</a:t>
+            </a:r>
+          </a:p>
+          <a:p>
+            <a:pPr>
+              <a:spcAft>
+                <a:spcPts val="600"/>
+              </a:spcAft>
+            </a:pPr>
+            <a:r>
+              <a:rPr b="1" sz="950">
+                <a:solidFill>
+                  <a:srgbClr val="FFFFFF"/>
+                </a:solidFill>
+              </a:rPr>
+              <a:t>• Foldable-Optimized Field App: </a:t>
+            </a:r>
+            <a:r>
+              <a:rPr sz="900">
+                <a:solidFill>
+                  <a:srgbClr val="BDC1C6"/>
+                </a:solidFill>
+              </a:rPr>
+              <a:t>Adaptive 3-tier radar HUD with dual-screen posture support (Pixel Fold / Surface Duo) and offline local caching.</a:t>
             </a:r>
           </a:p>
         </p:txBody>
       </p:sp>
       <p:sp>
         <p:nvSpPr>
-          <p:cNvPr id="65" name="Rounded Rectangle 64"/>
+          <p:cNvPr id="67" name="Rounded Rectangle 66"/>
           <p:cNvSpPr/>
           <p:nvPr/>
         </p:nvSpPr>
@@ -10466,63 +11802,86 @@
           <a:p>
             <a:pPr algn="ctr">
               <a:spcAft>
-                <a:spcPts val="1200"/>
-              </a:spcAft>
-              <a:defRPr sz="1300" b="1">
-                <a:solidFill>
-                  <a:srgbClr val="FDD663"/>
-                </a:solidFill>
-                <a:latin typeface="Google Sans Flex"/>
-              </a:defRPr>
-            </a:pPr>
-            <a:r>
-              <a:t>3. Production Cloud &amp; JAPAC GIS</a:t>
+                <a:spcPts val="1000"/>
+              </a:spcAft>
+              <a:defRPr sz="1250" b="1">
+                <a:solidFill>
+                  <a:srgbClr val="F28B82"/>
+                </a:solidFill>
+                <a:latin typeface="Google Sans Flex"/>
+              </a:defRPr>
+            </a:pPr>
+            <a:r>
+              <a:t>3. Production Cloud &amp; JAPAC Operations</a:t>
             </a:r>
           </a:p>
           <a:p>
             <a:pPr>
               <a:spcAft>
-                <a:spcPts val="800"/>
-              </a:spcAft>
-            </a:pPr>
-            <a:r>
-              <a:rPr b="1" sz="1050">
+                <a:spcPts val="600"/>
+              </a:spcAft>
+            </a:pPr>
+            <a:r>
+              <a:rPr b="1" sz="950">
                 <a:solidFill>
                   <a:srgbClr val="FFFFFF"/>
                 </a:solidFill>
               </a:rPr>
-              <a:t>• Cloud Run Microservice: </a:t>
-            </a:r>
-            <a:r>
-              <a:rPr sz="1000">
+              <a:t>• Optimized Cloud Run Microservice: </a:t>
+            </a:r>
+            <a:r>
+              <a:rPr sz="900">
                 <a:solidFill>
                   <a:srgbClr val="BDC1C6"/>
                 </a:solidFill>
               </a:rPr>
-              <a:t>Ultra-lightweight Go 1.24 distroless backend (&lt;10ms cold start) deployed in Singapore.</a:t>
+              <a:t>Go 1.24 distroless container with CPU boost &amp; async hydration (&lt;10ms cold start) deployed in Singapore (asia-southeast1).</a:t>
             </a:r>
           </a:p>
           <a:p>
             <a:pPr>
               <a:spcAft>
-                <a:spcPts val="800"/>
-              </a:spcAft>
-            </a:pPr>
-            <a:r>
-              <a:rPr b="1" sz="1050">
+                <a:spcPts val="600"/>
+              </a:spcAft>
+            </a:pPr>
+            <a:r>
+              <a:rPr b="1" sz="950">
                 <a:solidFill>
                   <a:srgbClr val="FFFFFF"/>
                 </a:solidFill>
               </a:rPr>
-              <a:t>• Angular 22 Admin Portal: </a:t>
-            </a:r>
-            <a:r>
-              <a:rPr sz="1000">
+              <a:t>• Angular 22 Admin Console: </a:t>
+            </a:r>
+            <a:r>
+              <a:rPr sz="900">
                 <a:solidFill>
                   <a:srgbClr val="BDC1C6"/>
                 </a:solidFill>
               </a:rPr>
-              <a:t>Full JAPAC Google Maps console with manual geofencing and emergency area broadcasts.</a:t>
+              <a:t>Full JAPAC Google Maps GIS console with manual geofencing overrides, GCS multi-photo uploads, and broadcast dispatches.</a:t>
+            </a:r>
+          </a:p>
+          <a:p>
+            <a:pPr>
+              <a:spcAft>
+                <a:spcPts val="600"/>
+              </a:spcAft>
+            </a:pPr>
+            <a:r>
+              <a:rPr b="1" sz="950">
+                <a:solidFill>
+                  <a:srgbClr val="FFFFFF"/>
+                </a:solidFill>
+              </a:rPr>
+              <a:t>• BigQuery GIS ML Lake: </a:t>
+            </a:r>
+            <a:r>
+              <a:rPr sz="900">
+                <a:solidFill>
+                  <a:srgbClr val="BDC1C6"/>
+                </a:solidFill>
+              </a:rPr>
+              <a:t>Continuous event streaming and automated model retraining pipeline with statistical gate verification.</a:t>
             </a:r>
           </a:p>
         </p:txBody>
@@ -10664,7 +12023,7 @@
               </a:defRPr>
             </a:pPr>
             <a:r>
-              <a:t>Brief about the idea: CoExist Shield AI</a:t>
+              <a:t>Brief about the idea</a:t>
             </a:r>
             <a:endParaRPr sz="1600">
               <a:latin typeface="Google Sans Flex Medium"/>
@@ -10684,7 +12043,7 @@
         <p:spPr>
           <a:xfrm>
             <a:off x="365760" y="1234440"/>
-            <a:ext cx="4069080" cy="3566160"/>
+            <a:ext cx="4114800" cy="3566160"/>
           </a:xfrm>
           <a:prstGeom prst="roundRect">
             <a:avLst/>
@@ -10713,16 +12072,16 @@
           </a:fontRef>
         </p:style>
         <p:txBody>
-          <a:bodyPr rtlCol="0" anchor="ctr" wrap="square" lIns="228600" tIns="201168" rIns="228600"/>
+          <a:bodyPr rtlCol="0" anchor="ctr" wrap="square" lIns="228600" tIns="182880" rIns="228600"/>
           <a:lstStyle/>
           <a:p>
             <a:pPr algn="ctr">
               <a:spcAft>
                 <a:spcPts val="1000"/>
               </a:spcAft>
-              <a:defRPr sz="1350" b="1">
-                <a:solidFill>
-                  <a:srgbClr val="81C995"/>
+              <a:defRPr sz="1300" b="1">
+                <a:solidFill>
+                  <a:srgbClr val="8AB4F8"/>
                 </a:solidFill>
                 <a:latin typeface="Google Sans Flex"/>
               </a:defRPr>
@@ -10738,7 +12097,7 @@
               </a:spcAft>
             </a:pPr>
             <a:r>
-              <a:rPr b="1" sz="1050">
+              <a:rPr b="1" sz="1000">
                 <a:solidFill>
                   <a:srgbClr val="FFFFFF"/>
                 </a:solidFill>
@@ -10746,12 +12105,12 @@
               <a:t>• Crop-Raiding Drivers: </a:t>
             </a:r>
             <a:r>
-              <a:rPr sz="1000">
+              <a:rPr sz="950">
                 <a:solidFill>
                   <a:srgbClr val="BDC1C6"/>
                 </a:solidFill>
               </a:rPr>
-              <a:t>Elephants raid plantations not randomly, but driven by acute olfactory attraction to high-calorie ripening sugarcane, bananas, and jackfruit.</a:t>
+              <a:t>Elephants raid agricultural lands not randomly, but driven by acute olfactory attraction to high-calorie ripening sugarcane, bananas, and jackfruit along forest boundaries.</a:t>
             </a:r>
           </a:p>
           <a:p>
@@ -10761,7 +12120,7 @@
               </a:spcAft>
             </a:pPr>
             <a:r>
-              <a:rPr b="1" sz="1050">
+              <a:rPr b="1" sz="1000">
                 <a:solidFill>
                   <a:srgbClr val="FFFFFF"/>
                 </a:solidFill>
@@ -10769,12 +12128,12 @@
               <a:t>• Predator Prey Magnets: </a:t>
             </a:r>
             <a:r>
-              <a:rPr sz="1000">
+              <a:rPr sz="950">
                 <a:solidFill>
                   <a:srgbClr val="BDC1C6"/>
                 </a:solidFill>
               </a:rPr>
-              <a:t>Tigers are lured to plantation edges by domestic livestock corrals and roadside carcasses. Tigers exhibit kill-site caching (returning over 24–72 hours), creating deadly ambush flashpoints.</a:t>
+              <a:t>Tigers and leopards are lured to plantation edges by open livestock corrals and roadside carcasses. Tigers exhibit kill-site caching (returning over 24–72 hours), creating deadly human ambush flashpoints.</a:t>
             </a:r>
           </a:p>
           <a:p>
@@ -10784,20 +12143,20 @@
               </a:spcAft>
             </a:pPr>
             <a:r>
-              <a:rPr b="1" sz="1050">
+              <a:rPr b="1" sz="1000">
                 <a:solidFill>
                   <a:srgbClr val="FFFFFF"/>
                 </a:solidFill>
               </a:rPr>
-              <a:t>• The Global One Health Threat: </a:t>
-            </a:r>
-            <a:r>
-              <a:rPr sz="1000">
+              <a:t>• Global One Health Threat: </a:t>
+            </a:r>
+            <a:r>
+              <a:rPr sz="950">
                 <a:solidFill>
                   <a:srgbClr val="BDC1C6"/>
                 </a:solidFill>
               </a:rPr>
-              <a:t>Decomposing carcasses breed infectious pathogens and fuel dangerous bushmeat trade, posing severe zoonotic pandemic risks.</a:t>
+              <a:t>Decomposing carcasses breed infectious pathogens and fuel dangerous bushmeat trade, posing catastrophic zoonotic spillover risks.</a:t>
             </a:r>
           </a:p>
         </p:txBody>
@@ -10810,8 +12169,8 @@
         </p:nvSpPr>
         <p:spPr>
           <a:xfrm>
-            <a:off x="4709160" y="1234440"/>
-            <a:ext cx="4069080" cy="3566160"/>
+            <a:off x="4663440" y="1234440"/>
+            <a:ext cx="4114800" cy="3566160"/>
           </a:xfrm>
           <a:prstGeom prst="roundRect">
             <a:avLst/>
@@ -10840,16 +12199,16 @@
           </a:fontRef>
         </p:style>
         <p:txBody>
-          <a:bodyPr rtlCol="0" anchor="ctr" wrap="square" lIns="228600" tIns="201168" rIns="228600"/>
+          <a:bodyPr rtlCol="0" anchor="ctr" wrap="square" lIns="228600" tIns="182880" rIns="228600"/>
           <a:lstStyle/>
           <a:p>
             <a:pPr algn="ctr">
               <a:spcAft>
                 <a:spcPts val="1000"/>
               </a:spcAft>
-              <a:defRPr sz="1350" b="1">
-                <a:solidFill>
-                  <a:srgbClr val="8AB4F8"/>
+              <a:defRPr sz="1300" b="1">
+                <a:solidFill>
+                  <a:srgbClr val="81C995"/>
                 </a:solidFill>
                 <a:latin typeface="Google Sans Flex"/>
               </a:defRPr>
@@ -10865,7 +12224,7 @@
               </a:spcAft>
             </a:pPr>
             <a:r>
-              <a:rPr b="1" sz="1050">
+              <a:rPr b="1" sz="1000">
                 <a:solidFill>
                   <a:srgbClr val="FFFFFF"/>
                 </a:solidFill>
@@ -10873,7 +12232,7 @@
               <a:t>• Predictive Geofencing Engine: </a:t>
             </a:r>
             <a:r>
-              <a:rPr sz="1000">
+              <a:rPr sz="950">
                 <a:solidFill>
                   <a:srgbClr val="BDC1C6"/>
                 </a:solidFill>
@@ -10888,20 +12247,20 @@
               </a:spcAft>
             </a:pPr>
             <a:r>
-              <a:rPr b="1" sz="1050">
+              <a:rPr b="1" sz="1000">
                 <a:solidFill>
                   <a:srgbClr val="FFFFFF"/>
                 </a:solidFill>
               </a:rPr>
-              <a:t>• Instant Multi-Surface Alerts: </a:t>
-            </a:r>
-            <a:r>
-              <a:rPr sz="1000">
+              <a:t>• Dual-Watch Instant Alerts: </a:t>
+            </a:r>
+            <a:r>
+              <a:rPr sz="950">
                 <a:solidFill>
                   <a:srgbClr val="BDC1C6"/>
                 </a:solidFill>
               </a:rPr>
-              <a:t>Delivers sub-second 3-tier warnings (Notice / Warning / Danger Siren) to mobile devices and Wear OS smartwatches before field workers enter danger zones.</a:t>
+              <a:t>Delivers sub-second 3-tier warnings (Notice / Warning / Danger Siren) to mobile devices, Wear OS, and Apple Watch with directional wrist haptics before entering danger zones.</a:t>
             </a:r>
           </a:p>
           <a:p>
@@ -10911,7 +12270,7 @@
               </a:spcAft>
             </a:pPr>
             <a:r>
-              <a:rPr b="1" sz="1050">
+              <a:rPr b="1" sz="1000">
                 <a:solidFill>
                   <a:srgbClr val="FFFFFF"/>
                 </a:solidFill>
@@ -10919,7 +12278,7 @@
               <a:t>• Actionable Incident Response: </a:t>
             </a:r>
             <a:r>
-              <a:rPr sz="1000">
+              <a:rPr sz="950">
                 <a:solidFill>
                   <a:srgbClr val="BDC1C6"/>
                 </a:solidFill>
@@ -11157,7 +12516,7 @@
               </a:defRPr>
             </a:pPr>
             <a:r>
-              <a:t>High-Stakes Opportunities</a:t>
+              <a:t>Opportunities &amp; Scale</a:t>
             </a:r>
           </a:p>
           <a:p>
@@ -11167,7 +12526,7 @@
               </a:spcAft>
             </a:pPr>
             <a:r>
-              <a:rPr b="1" sz="1000">
+              <a:rPr b="1" sz="950">
                 <a:solidFill>
                   <a:srgbClr val="FFFFFF"/>
                 </a:solidFill>
@@ -11175,7 +12534,7 @@
               <a:t>• Global Economic Toll: </a:t>
             </a:r>
             <a:r>
-              <a:rPr sz="950">
+              <a:rPr sz="900">
                 <a:solidFill>
                   <a:srgbClr val="BDC1C6"/>
                 </a:solidFill>
@@ -11190,7 +12549,7 @@
               </a:spcAft>
             </a:pPr>
             <a:r>
-              <a:rPr b="1" sz="1000">
+              <a:rPr b="1" sz="950">
                 <a:solidFill>
                   <a:srgbClr val="FFFFFF"/>
                 </a:solidFill>
@@ -11198,7 +12557,7 @@
               <a:t>• Labor Stoppage Costs: </a:t>
             </a:r>
             <a:r>
-              <a:rPr sz="950">
+              <a:rPr sz="900">
                 <a:solidFill>
                   <a:srgbClr val="BDC1C6"/>
                 </a:solidFill>
@@ -11213,7 +12572,7 @@
               </a:spcAft>
             </a:pPr>
             <a:r>
-              <a:rPr b="1" sz="1000">
+              <a:rPr b="1" sz="950">
                 <a:solidFill>
                   <a:srgbClr val="FFFFFF"/>
                 </a:solidFill>
@@ -11221,7 +12580,7 @@
               <a:t>• ESG &amp; RSPO Mandates: </a:t>
             </a:r>
             <a:r>
-              <a:rPr sz="950">
+              <a:rPr sz="900">
                 <a:solidFill>
                   <a:srgbClr val="BDC1C6"/>
                 </a:solidFill>
@@ -11294,7 +12653,7 @@
               </a:spcAft>
             </a:pPr>
             <a:r>
-              <a:rPr b="1" sz="1000">
+              <a:rPr b="1" sz="950">
                 <a:solidFill>
                   <a:srgbClr val="FFFFFF"/>
                 </a:solidFill>
@@ -11302,7 +12661,7 @@
               <a:t>• Root-Cause Elimination: </a:t>
             </a:r>
             <a:r>
-              <a:rPr sz="950">
+              <a:rPr sz="900">
                 <a:solidFill>
                   <a:srgbClr val="BDC1C6"/>
                 </a:solidFill>
@@ -11317,7 +12676,7 @@
               </a:spcAft>
             </a:pPr>
             <a:r>
-              <a:rPr b="1" sz="1000">
+              <a:rPr b="1" sz="950">
                 <a:solidFill>
                   <a:srgbClr val="FFFFFF"/>
                 </a:solidFill>
@@ -11325,7 +12684,7 @@
               <a:t>• Sub-Second Early Warning: </a:t>
             </a:r>
             <a:r>
-              <a:rPr sz="950">
+              <a:rPr sz="900">
                 <a:solidFill>
                   <a:srgbClr val="BDC1C6"/>
                 </a:solidFill>
@@ -11340,7 +12699,7 @@
               </a:spcAft>
             </a:pPr>
             <a:r>
-              <a:rPr b="1" sz="1000">
+              <a:rPr b="1" sz="950">
                 <a:solidFill>
                   <a:srgbClr val="FFFFFF"/>
                 </a:solidFill>
@@ -11348,7 +12707,7 @@
               <a:t>• Continuous Learning Loop: </a:t>
             </a:r>
             <a:r>
-              <a:rPr sz="950">
+              <a:rPr sz="900">
                 <a:solidFill>
                   <a:srgbClr val="BDC1C6"/>
                 </a:solidFill>
@@ -11411,7 +12770,7 @@
               </a:defRPr>
             </a:pPr>
             <a:r>
-              <a:t>Core USP</a:t>
+              <a:t>USP of Proposed Solution</a:t>
             </a:r>
           </a:p>
           <a:p>
@@ -11421,7 +12780,7 @@
               </a:spcAft>
             </a:pPr>
             <a:r>
-              <a:rPr b="1" sz="1000">
+              <a:rPr b="1" sz="950">
                 <a:solidFill>
                   <a:srgbClr val="FFFFFF"/>
                 </a:solidFill>
@@ -11429,7 +12788,7 @@
               <a:t>• Causal-Driven (Not Collar-Bound): </a:t>
             </a:r>
             <a:r>
-              <a:rPr sz="950">
+              <a:rPr sz="900">
                 <a:solidFill>
                   <a:srgbClr val="BDC1C6"/>
                 </a:solidFill>
@@ -11444,20 +12803,20 @@
               </a:spcAft>
             </a:pPr>
             <a:r>
-              <a:rPr b="1" sz="1000">
+              <a:rPr b="1" sz="950">
                 <a:solidFill>
                   <a:srgbClr val="FFFFFF"/>
                 </a:solidFill>
               </a:rPr>
-              <a:t>• Tactile Wear OS Integration: </a:t>
-            </a:r>
-            <a:r>
-              <a:rPr sz="950">
+              <a:t>• Dual Smartwatch Support: </a:t>
+            </a:r>
+            <a:r>
+              <a:rPr sz="900">
                 <a:solidFill>
                   <a:srgbClr val="BDC1C6"/>
                 </a:solidFill>
               </a:rPr>
-              <a:t>Distinct escalating wrist haptic waveforms allow zero-visibility situational awareness in dense jungle.</a:t>
+              <a:t>Tactile wrist haptics on both Wear OS (Compose) &amp; Apple Watch (SwiftUI Taptic) for zero-visibility awareness.</a:t>
             </a:r>
           </a:p>
           <a:p>
@@ -11467,7 +12826,7 @@
               </a:spcAft>
             </a:pPr>
             <a:r>
-              <a:rPr b="1" sz="1000">
+              <a:rPr b="1" sz="950">
                 <a:solidFill>
                   <a:srgbClr val="FFFFFF"/>
                 </a:solidFill>
@@ -11475,12 +12834,12 @@
               <a:t>• Live Full-Stack Deployment: </a:t>
             </a:r>
             <a:r>
-              <a:rPr sz="950">
+              <a:rPr sz="900">
                 <a:solidFill>
                   <a:srgbClr val="BDC1C6"/>
                 </a:solidFill>
               </a:rPr>
-              <a:t>Sub-10ms Go serverless backend + production Angular 22 admin + Kotlin Multiplatform client.</a:t>
+              <a:t>Sub-10ms Go serverless backend + production Angular 22 admin + Gemini 3.8 Flash multimodal triage.</a:t>
             </a:r>
           </a:p>
         </p:txBody>
@@ -11705,7 +13064,7 @@
               <a:spcAft>
                 <a:spcPts val="300"/>
               </a:spcAft>
-              <a:defRPr sz="1200" b="1">
+              <a:defRPr sz="1150" b="1">
                 <a:solidFill>
                   <a:srgbClr val="8AB4F8"/>
                 </a:solidFill>
@@ -11718,7 +13077,7 @@
           </a:p>
           <a:p>
             <a:pPr>
-              <a:defRPr sz="950">
+              <a:defRPr sz="900">
                 <a:solidFill>
                   <a:srgbClr val="E8EAED"/>
                 </a:solidFill>
@@ -11726,7 +13085,7 @@
               </a:defRPr>
             </a:pPr>
             <a:r>
-              <a:t>Progressive geofence warnings: Tier 1 Notice (Green/Yellow), Tier 2 Warning (Amber), Tier 3 Danger (Red siren + evacuation dispatch).</a:t>
+              <a:t>Progressive geofence warnings: Tier 1 Notice (Green/Yellow), Tier 2 Warning (Amber), Tier 3 Danger (Red siren + evacuation dispatch). Adaptive foldable dual-screen support.</a:t>
             </a:r>
           </a:p>
         </p:txBody>
@@ -11776,7 +13135,7 @@
               <a:spcAft>
                 <a:spcPts val="300"/>
               </a:spcAft>
-              <a:defRPr sz="1200" b="1">
+              <a:defRPr sz="1150" b="1">
                 <a:solidFill>
                   <a:srgbClr val="8AB4F8"/>
                 </a:solidFill>
@@ -11784,12 +13143,12 @@
               </a:defRPr>
             </a:pPr>
             <a:r>
-              <a:t>2. Wear OS Tactical Wrist HUD</a:t>
+              <a:t>2. Dual Smartwatch Companion Apps</a:t>
             </a:r>
           </a:p>
           <a:p>
             <a:pPr>
-              <a:defRPr sz="950">
+              <a:defRPr sz="900">
                 <a:solidFill>
                   <a:srgbClr val="E8EAED"/>
                 </a:solidFill>
@@ -11797,7 +13156,7 @@
               </a:defRPr>
             </a:pPr>
             <a:r>
-              <a:t>Circular AMOLED display with ambient radial glow, inner dashed radar ring, and 4 distinct tactile haptic pulse patterns.</a:t>
+              <a:t>Native Wear OS (Compose) &amp; Apple Watch (SwiftUI / watchOS 9.0+) apps with circular tactical HUD, Taptic/vibrator haptics, WCSession sync, and one-tap reverse siren mute.</a:t>
             </a:r>
           </a:p>
         </p:txBody>
@@ -11847,7 +13206,7 @@
               <a:spcAft>
                 <a:spcPts val="300"/>
               </a:spcAft>
-              <a:defRPr sz="1200" b="1">
+              <a:defRPr sz="1150" b="1">
                 <a:solidFill>
                   <a:srgbClr val="8AB4F8"/>
                 </a:solidFill>
@@ -11855,12 +13214,12 @@
               </a:defRPr>
             </a:pPr>
             <a:r>
-              <a:t>3. Multimodal Photo Forensics</a:t>
+              <a:t>3. Multimodal Photo Forensics (Gemini 3.8 Flash)</a:t>
             </a:r>
           </a:p>
           <a:p>
             <a:pPr>
-              <a:defRPr sz="950">
+              <a:defRPr sz="900">
                 <a:solidFill>
                   <a:srgbClr val="E8EAED"/>
                 </a:solidFill>
@@ -11868,7 +13227,7 @@
               </a:defRPr>
             </a:pPr>
             <a:r>
-              <a:t>Gemini 2.5 Flash sub-2s automated classification of wildlife species, fruit ripeness stages, and carcass decay forensic analysis.</a:t>
+              <a:t>Google Gemini 3.8 Flash sub-1s automated triage: species classification, fruit ripening maturity, and carcass forensic decay analysis (Fresh/Moderate/Advanced).</a:t>
             </a:r>
           </a:p>
         </p:txBody>
@@ -11918,7 +13277,7 @@
               <a:spcAft>
                 <a:spcPts val="300"/>
               </a:spcAft>
-              <a:defRPr sz="1200" b="1">
+              <a:defRPr sz="1150" b="1">
                 <a:solidFill>
                   <a:srgbClr val="8AB4F8"/>
                 </a:solidFill>
@@ -11931,7 +13290,7 @@
           </a:p>
           <a:p>
             <a:pPr>
-              <a:defRPr sz="950">
+              <a:defRPr sz="900">
                 <a:solidFill>
                   <a:srgbClr val="E8EAED"/>
                 </a:solidFill>
@@ -11989,7 +13348,7 @@
               <a:spcAft>
                 <a:spcPts val="300"/>
               </a:spcAft>
-              <a:defRPr sz="1200" b="1">
+              <a:defRPr sz="1150" b="1">
                 <a:solidFill>
                   <a:srgbClr val="8AB4F8"/>
                 </a:solidFill>
@@ -12002,7 +13361,7 @@
           </a:p>
           <a:p>
             <a:pPr>
-              <a:defRPr sz="950">
+              <a:defRPr sz="900">
                 <a:solidFill>
                   <a:srgbClr val="E8EAED"/>
                 </a:solidFill>
@@ -12010,7 +13369,7 @@
               </a:defRPr>
             </a:pPr>
             <a:r>
-              <a:t>Angular 22 portal with Google Maps JS API, 2-column Map-Picker tabs, manual circle/polygon geofence overrides, and GCS photo uploads.</a:t>
+              <a:t>Angular 22 portal with Google Maps JS API, 2-column Map-Picker tabs, manual circle/polygon geofence overrides, and GCS multi-photo uploads.</a:t>
             </a:r>
           </a:p>
         </p:txBody>
@@ -12060,7 +13419,7 @@
               <a:spcAft>
                 <a:spcPts val="300"/>
               </a:spcAft>
-              <a:defRPr sz="1200" b="1">
+              <a:defRPr sz="1150" b="1">
                 <a:solidFill>
                   <a:srgbClr val="8AB4F8"/>
                 </a:solidFill>
@@ -12073,7 +13432,7 @@
           </a:p>
           <a:p>
             <a:pPr>
-              <a:defRPr sz="950">
+              <a:defRPr sz="900">
                 <a:solidFill>
                   <a:srgbClr val="E8EAED"/>
                 </a:solidFill>
@@ -12250,7 +13609,7 @@
               </a:defRPr>
             </a:pPr>
             <a:r>
-              <a:t>Process flow diagram &amp; End-to-End Use Cases</a:t>
+              <a:t>Process flow diagram or Use-case diagram</a:t>
             </a:r>
             <a:endParaRPr sz="1600">
               <a:latin typeface="Google Sans Flex Medium"/>
@@ -12269,8 +13628,950 @@
         </p:nvSpPr>
         <p:spPr>
           <a:xfrm>
-            <a:off x="365760" y="1234440"/>
-            <a:ext cx="8412480" cy="1078992"/>
+            <a:off x="365760" y="1115568"/>
+            <a:ext cx="1536192" cy="2057400"/>
+          </a:xfrm>
+          <a:prstGeom prst="roundRect">
+            <a:avLst/>
+          </a:prstGeom>
+          <a:solidFill>
+            <a:srgbClr val="181A20"/>
+          </a:solidFill>
+          <a:ln w="12700">
+            <a:solidFill>
+              <a:srgbClr val="4285F4"/>
+            </a:solidFill>
+          </a:ln>
+        </p:spPr>
+        <p:style>
+          <a:lnRef idx="1">
+            <a:schemeClr val="accent1"/>
+          </a:lnRef>
+          <a:fillRef idx="3">
+            <a:schemeClr val="accent1"/>
+          </a:fillRef>
+          <a:effectRef idx="2">
+            <a:schemeClr val="accent1"/>
+          </a:effectRef>
+          <a:fontRef idx="minor">
+            <a:schemeClr val="lt1"/>
+          </a:fontRef>
+        </p:style>
+        <p:txBody>
+          <a:bodyPr rtlCol="0" anchor="ctr" wrap="square" tIns="91440"/>
+          <a:lstStyle/>
+          <a:p>
+            <a:pPr algn="ctr">
+              <a:spcAft>
+                <a:spcPts val="200"/>
+              </a:spcAft>
+              <a:defRPr sz="850" b="1">
+                <a:solidFill>
+                  <a:srgbClr val="8AB4F8"/>
+                </a:solidFill>
+                <a:latin typeface="Google Sans Flex"/>
+              </a:defRPr>
+            </a:pPr>
+            <a:r>
+              <a:t>STAGE 1: INGESTION</a:t>
+            </a:r>
+          </a:p>
+          <a:p>
+            <a:pPr>
+              <a:spcAft>
+                <a:spcPts val="400"/>
+              </a:spcAft>
+              <a:defRPr sz="800" b="1">
+                <a:solidFill>
+                  <a:srgbClr val="FFFFFF"/>
+                </a:solidFill>
+                <a:latin typeface="Google Sans Flex"/>
+              </a:defRPr>
+            </a:pPr>
+            <a:r>
+              <a:t>Multi-Source Causal</a:t>
+            </a:r>
+          </a:p>
+          <a:p>
+            <a:pPr>
+              <a:spcAft>
+                <a:spcPts val="200"/>
+              </a:spcAft>
+              <a:defRPr sz="750">
+                <a:solidFill>
+                  <a:srgbClr val="BDC1C6"/>
+                </a:solidFill>
+                <a:latin typeface="Google Sans Flex"/>
+              </a:defRPr>
+            </a:pPr>
+            <a:r>
+              <a:t>• NASA FIRMS (Fires)</a:t>
+            </a:r>
+          </a:p>
+          <a:p>
+            <a:pPr>
+              <a:spcAft>
+                <a:spcPts val="200"/>
+              </a:spcAft>
+              <a:defRPr sz="750">
+                <a:solidFill>
+                  <a:srgbClr val="BDC1C6"/>
+                </a:solidFill>
+                <a:latin typeface="Google Sans Flex"/>
+              </a:defRPr>
+            </a:pPr>
+            <a:r>
+              <a:t>• Open-Meteo Weather</a:t>
+            </a:r>
+          </a:p>
+          <a:p>
+            <a:pPr>
+              <a:spcAft>
+                <a:spcPts val="200"/>
+              </a:spcAft>
+              <a:defRPr sz="750">
+                <a:solidFill>
+                  <a:srgbClr val="BDC1C6"/>
+                </a:solidFill>
+                <a:latin typeface="Google Sans Flex"/>
+              </a:defRPr>
+            </a:pPr>
+            <a:r>
+              <a:t>• Crop Ripening Phenology</a:t>
+            </a:r>
+          </a:p>
+          <a:p>
+            <a:pPr>
+              <a:spcAft>
+                <a:spcPts val="200"/>
+              </a:spcAft>
+              <a:defRPr sz="750">
+                <a:solidFill>
+                  <a:srgbClr val="BDC1C6"/>
+                </a:solidFill>
+                <a:latin typeface="Google Sans Flex"/>
+              </a:defRPr>
+            </a:pPr>
+            <a:r>
+              <a:t>• Road Traffic Feeds</a:t>
+            </a:r>
+          </a:p>
+          <a:p>
+            <a:pPr>
+              <a:spcAft>
+                <a:spcPts val="200"/>
+              </a:spcAft>
+              <a:defRPr sz="750">
+                <a:solidFill>
+                  <a:srgbClr val="BDC1C6"/>
+                </a:solidFill>
+                <a:latin typeface="Google Sans Flex"/>
+              </a:defRPr>
+            </a:pPr>
+            <a:r>
+              <a:t>• Citizen Sightings &amp; Logs</a:t>
+            </a:r>
+          </a:p>
+        </p:txBody>
+      </p:sp>
+      <p:sp>
+        <p:nvSpPr>
+          <p:cNvPr id="97" name="Right Arrow 96"/>
+          <p:cNvSpPr/>
+          <p:nvPr/>
+        </p:nvSpPr>
+        <p:spPr>
+          <a:xfrm>
+            <a:off x="1929384" y="2029968"/>
+            <a:ext cx="128016" cy="182880"/>
+          </a:xfrm>
+          <a:prstGeom prst="rightArrow">
+            <a:avLst/>
+          </a:prstGeom>
+          <a:solidFill>
+            <a:srgbClr val="8AB4F8"/>
+          </a:solidFill>
+          <a:ln>
+            <a:noFill/>
+          </a:ln>
+        </p:spPr>
+        <p:style>
+          <a:lnRef idx="1">
+            <a:schemeClr val="accent1"/>
+          </a:lnRef>
+          <a:fillRef idx="3">
+            <a:schemeClr val="accent1"/>
+          </a:fillRef>
+          <a:effectRef idx="2">
+            <a:schemeClr val="accent1"/>
+          </a:effectRef>
+          <a:fontRef idx="minor">
+            <a:schemeClr val="lt1"/>
+          </a:fontRef>
+        </p:style>
+        <p:txBody>
+          <a:bodyPr rtlCol="0" anchor="ctr"/>
+          <a:lstStyle/>
+          <a:p>
+            <a:pPr algn="ctr"/>
+          </a:p>
+        </p:txBody>
+      </p:sp>
+      <p:sp>
+        <p:nvSpPr>
+          <p:cNvPr id="98" name="Rounded Rectangle 97"/>
+          <p:cNvSpPr/>
+          <p:nvPr/>
+        </p:nvSpPr>
+        <p:spPr>
+          <a:xfrm>
+            <a:off x="2084832" y="1115568"/>
+            <a:ext cx="1536192" cy="2057400"/>
+          </a:xfrm>
+          <a:prstGeom prst="roundRect">
+            <a:avLst/>
+          </a:prstGeom>
+          <a:solidFill>
+            <a:srgbClr val="181A20"/>
+          </a:solidFill>
+          <a:ln w="12700">
+            <a:solidFill>
+              <a:srgbClr val="34A853"/>
+            </a:solidFill>
+          </a:ln>
+        </p:spPr>
+        <p:style>
+          <a:lnRef idx="1">
+            <a:schemeClr val="accent1"/>
+          </a:lnRef>
+          <a:fillRef idx="3">
+            <a:schemeClr val="accent1"/>
+          </a:fillRef>
+          <a:effectRef idx="2">
+            <a:schemeClr val="accent1"/>
+          </a:effectRef>
+          <a:fontRef idx="minor">
+            <a:schemeClr val="lt1"/>
+          </a:fontRef>
+        </p:style>
+        <p:txBody>
+          <a:bodyPr rtlCol="0" anchor="ctr" wrap="square" tIns="91440"/>
+          <a:lstStyle/>
+          <a:p>
+            <a:pPr algn="ctr">
+              <a:spcAft>
+                <a:spcPts val="200"/>
+              </a:spcAft>
+              <a:defRPr sz="850" b="1">
+                <a:solidFill>
+                  <a:srgbClr val="81C995"/>
+                </a:solidFill>
+                <a:latin typeface="Google Sans Flex"/>
+              </a:defRPr>
+            </a:pPr>
+            <a:r>
+              <a:t>STAGE 2: FORENSICS</a:t>
+            </a:r>
+          </a:p>
+          <a:p>
+            <a:pPr>
+              <a:spcAft>
+                <a:spcPts val="400"/>
+              </a:spcAft>
+              <a:defRPr sz="800" b="1">
+                <a:solidFill>
+                  <a:srgbClr val="FFFFFF"/>
+                </a:solidFill>
+                <a:latin typeface="Google Sans Flex"/>
+              </a:defRPr>
+            </a:pPr>
+            <a:r>
+              <a:t>Gemini 3.8 Flash</a:t>
+            </a:r>
+          </a:p>
+          <a:p>
+            <a:pPr>
+              <a:spcAft>
+                <a:spcPts val="200"/>
+              </a:spcAft>
+              <a:defRPr sz="750">
+                <a:solidFill>
+                  <a:srgbClr val="BDC1C6"/>
+                </a:solidFill>
+                <a:latin typeface="Google Sans Flex"/>
+              </a:defRPr>
+            </a:pPr>
+            <a:r>
+              <a:t>• Multimodal Photo Triage</a:t>
+            </a:r>
+          </a:p>
+          <a:p>
+            <a:pPr>
+              <a:spcAft>
+                <a:spcPts val="200"/>
+              </a:spcAft>
+              <a:defRPr sz="750">
+                <a:solidFill>
+                  <a:srgbClr val="BDC1C6"/>
+                </a:solidFill>
+                <a:latin typeface="Google Sans Flex"/>
+              </a:defRPr>
+            </a:pPr>
+            <a:r>
+              <a:t>• Species Identification</a:t>
+            </a:r>
+          </a:p>
+          <a:p>
+            <a:pPr>
+              <a:spcAft>
+                <a:spcPts val="200"/>
+              </a:spcAft>
+              <a:defRPr sz="750">
+                <a:solidFill>
+                  <a:srgbClr val="BDC1C6"/>
+                </a:solidFill>
+                <a:latin typeface="Google Sans Flex"/>
+              </a:defRPr>
+            </a:pPr>
+            <a:r>
+              <a:t>• Fruit Ripeness Level</a:t>
+            </a:r>
+          </a:p>
+          <a:p>
+            <a:pPr>
+              <a:spcAft>
+                <a:spcPts val="200"/>
+              </a:spcAft>
+              <a:defRPr sz="750">
+                <a:solidFill>
+                  <a:srgbClr val="BDC1C6"/>
+                </a:solidFill>
+                <a:latin typeface="Google Sans Flex"/>
+              </a:defRPr>
+            </a:pPr>
+            <a:r>
+              <a:t>• Decay Stage Forensics</a:t>
+            </a:r>
+          </a:p>
+          <a:p>
+            <a:pPr>
+              <a:spcAft>
+                <a:spcPts val="200"/>
+              </a:spcAft>
+              <a:defRPr sz="750">
+                <a:solidFill>
+                  <a:srgbClr val="BDC1C6"/>
+                </a:solidFill>
+                <a:latin typeface="Google Sans Flex"/>
+              </a:defRPr>
+            </a:pPr>
+            <a:r>
+              <a:t>• Sub-1s JSON Schema Contract</a:t>
+            </a:r>
+          </a:p>
+        </p:txBody>
+      </p:sp>
+      <p:sp>
+        <p:nvSpPr>
+          <p:cNvPr id="99" name="Right Arrow 98"/>
+          <p:cNvSpPr/>
+          <p:nvPr/>
+        </p:nvSpPr>
+        <p:spPr>
+          <a:xfrm>
+            <a:off x="3648456" y="2029968"/>
+            <a:ext cx="128016" cy="182880"/>
+          </a:xfrm>
+          <a:prstGeom prst="rightArrow">
+            <a:avLst/>
+          </a:prstGeom>
+          <a:solidFill>
+            <a:srgbClr val="81C995"/>
+          </a:solidFill>
+          <a:ln>
+            <a:noFill/>
+          </a:ln>
+        </p:spPr>
+        <p:style>
+          <a:lnRef idx="1">
+            <a:schemeClr val="accent1"/>
+          </a:lnRef>
+          <a:fillRef idx="3">
+            <a:schemeClr val="accent1"/>
+          </a:fillRef>
+          <a:effectRef idx="2">
+            <a:schemeClr val="accent1"/>
+          </a:effectRef>
+          <a:fontRef idx="minor">
+            <a:schemeClr val="lt1"/>
+          </a:fontRef>
+        </p:style>
+        <p:txBody>
+          <a:bodyPr rtlCol="0" anchor="ctr"/>
+          <a:lstStyle/>
+          <a:p>
+            <a:pPr algn="ctr"/>
+          </a:p>
+        </p:txBody>
+      </p:sp>
+      <p:sp>
+        <p:nvSpPr>
+          <p:cNvPr id="100" name="Rounded Rectangle 99"/>
+          <p:cNvSpPr/>
+          <p:nvPr/>
+        </p:nvSpPr>
+        <p:spPr>
+          <a:xfrm>
+            <a:off x="3803904" y="1115568"/>
+            <a:ext cx="1536192" cy="2057400"/>
+          </a:xfrm>
+          <a:prstGeom prst="roundRect">
+            <a:avLst/>
+          </a:prstGeom>
+          <a:solidFill>
+            <a:srgbClr val="181A20"/>
+          </a:solidFill>
+          <a:ln w="12700">
+            <a:solidFill>
+              <a:srgbClr val="FBBC04"/>
+            </a:solidFill>
+          </a:ln>
+        </p:spPr>
+        <p:style>
+          <a:lnRef idx="1">
+            <a:schemeClr val="accent1"/>
+          </a:lnRef>
+          <a:fillRef idx="3">
+            <a:schemeClr val="accent1"/>
+          </a:fillRef>
+          <a:effectRef idx="2">
+            <a:schemeClr val="accent1"/>
+          </a:effectRef>
+          <a:fontRef idx="minor">
+            <a:schemeClr val="lt1"/>
+          </a:fontRef>
+        </p:style>
+        <p:txBody>
+          <a:bodyPr rtlCol="0" anchor="ctr" wrap="square" tIns="91440"/>
+          <a:lstStyle/>
+          <a:p>
+            <a:pPr algn="ctr">
+              <a:spcAft>
+                <a:spcPts val="200"/>
+              </a:spcAft>
+              <a:defRPr sz="850" b="1">
+                <a:solidFill>
+                  <a:srgbClr val="FDD663"/>
+                </a:solidFill>
+                <a:latin typeface="Google Sans Flex"/>
+              </a:defRPr>
+            </a:pPr>
+            <a:r>
+              <a:t>STAGE 3: INFERENCE</a:t>
+            </a:r>
+          </a:p>
+          <a:p>
+            <a:pPr>
+              <a:spcAft>
+                <a:spcPts val="400"/>
+              </a:spcAft>
+              <a:defRPr sz="800" b="1">
+                <a:solidFill>
+                  <a:srgbClr val="FFFFFF"/>
+                </a:solidFill>
+                <a:latin typeface="Google Sans Flex"/>
+              </a:defRPr>
+            </a:pPr>
+            <a:r>
+              <a:t>Cloud Run Engine</a:t>
+            </a:r>
+          </a:p>
+          <a:p>
+            <a:pPr>
+              <a:spcAft>
+                <a:spcPts val="200"/>
+              </a:spcAft>
+              <a:defRPr sz="750">
+                <a:solidFill>
+                  <a:srgbClr val="BDC1C6"/>
+                </a:solidFill>
+                <a:latin typeface="Google Sans Flex"/>
+              </a:defRPr>
+            </a:pPr>
+            <a:r>
+              <a:t>• Sub-10ms Go Microservice</a:t>
+            </a:r>
+          </a:p>
+          <a:p>
+            <a:pPr>
+              <a:spcAft>
+                <a:spcPts val="200"/>
+              </a:spcAft>
+              <a:defRPr sz="750">
+                <a:solidFill>
+                  <a:srgbClr val="BDC1C6"/>
+                </a:solidFill>
+                <a:latin typeface="Google Sans Flex"/>
+              </a:defRPr>
+            </a:pPr>
+            <a:r>
+              <a:t>• Geospatial Spatial Joins</a:t>
+            </a:r>
+          </a:p>
+          <a:p>
+            <a:pPr>
+              <a:spcAft>
+                <a:spcPts val="200"/>
+              </a:spcAft>
+              <a:defRPr sz="750">
+                <a:solidFill>
+                  <a:srgbClr val="BDC1C6"/>
+                </a:solidFill>
+                <a:latin typeface="Google Sans Flex"/>
+              </a:defRPr>
+            </a:pPr>
+            <a:r>
+              <a:t>• Dynamic Risk Weighting</a:t>
+            </a:r>
+          </a:p>
+          <a:p>
+            <a:pPr>
+              <a:spcAft>
+                <a:spcPts val="200"/>
+              </a:spcAft>
+              <a:defRPr sz="750">
+                <a:solidFill>
+                  <a:srgbClr val="BDC1C6"/>
+                </a:solidFill>
+                <a:latin typeface="Google Sans Flex"/>
+              </a:defRPr>
+            </a:pPr>
+            <a:r>
+              <a:t>• H3 Hexagonal Grid Index</a:t>
+            </a:r>
+          </a:p>
+          <a:p>
+            <a:pPr>
+              <a:spcAft>
+                <a:spcPts val="200"/>
+              </a:spcAft>
+              <a:defRPr sz="750">
+                <a:solidFill>
+                  <a:srgbClr val="BDC1C6"/>
+                </a:solidFill>
+                <a:latin typeface="Google Sans Flex"/>
+              </a:defRPr>
+            </a:pPr>
+            <a:r>
+              <a:t>• 3-Tier Danger Polygons</a:t>
+            </a:r>
+          </a:p>
+        </p:txBody>
+      </p:sp>
+      <p:sp>
+        <p:nvSpPr>
+          <p:cNvPr id="101" name="Right Arrow 100"/>
+          <p:cNvSpPr/>
+          <p:nvPr/>
+        </p:nvSpPr>
+        <p:spPr>
+          <a:xfrm>
+            <a:off x="5367528" y="2029968"/>
+            <a:ext cx="128016" cy="182880"/>
+          </a:xfrm>
+          <a:prstGeom prst="rightArrow">
+            <a:avLst/>
+          </a:prstGeom>
+          <a:solidFill>
+            <a:srgbClr val="FDD663"/>
+          </a:solidFill>
+          <a:ln>
+            <a:noFill/>
+          </a:ln>
+        </p:spPr>
+        <p:style>
+          <a:lnRef idx="1">
+            <a:schemeClr val="accent1"/>
+          </a:lnRef>
+          <a:fillRef idx="3">
+            <a:schemeClr val="accent1"/>
+          </a:fillRef>
+          <a:effectRef idx="2">
+            <a:schemeClr val="accent1"/>
+          </a:effectRef>
+          <a:fontRef idx="minor">
+            <a:schemeClr val="lt1"/>
+          </a:fontRef>
+        </p:style>
+        <p:txBody>
+          <a:bodyPr rtlCol="0" anchor="ctr"/>
+          <a:lstStyle/>
+          <a:p>
+            <a:pPr algn="ctr"/>
+          </a:p>
+        </p:txBody>
+      </p:sp>
+      <p:sp>
+        <p:nvSpPr>
+          <p:cNvPr id="102" name="Rounded Rectangle 101"/>
+          <p:cNvSpPr/>
+          <p:nvPr/>
+        </p:nvSpPr>
+        <p:spPr>
+          <a:xfrm>
+            <a:off x="5522976" y="1115568"/>
+            <a:ext cx="1536192" cy="2057400"/>
+          </a:xfrm>
+          <a:prstGeom prst="roundRect">
+            <a:avLst/>
+          </a:prstGeom>
+          <a:solidFill>
+            <a:srgbClr val="181A20"/>
+          </a:solidFill>
+          <a:ln w="12700">
+            <a:solidFill>
+              <a:srgbClr val="EA4335"/>
+            </a:solidFill>
+          </a:ln>
+        </p:spPr>
+        <p:style>
+          <a:lnRef idx="1">
+            <a:schemeClr val="accent1"/>
+          </a:lnRef>
+          <a:fillRef idx="3">
+            <a:schemeClr val="accent1"/>
+          </a:fillRef>
+          <a:effectRef idx="2">
+            <a:schemeClr val="accent1"/>
+          </a:effectRef>
+          <a:fontRef idx="minor">
+            <a:schemeClr val="lt1"/>
+          </a:fontRef>
+        </p:style>
+        <p:txBody>
+          <a:bodyPr rtlCol="0" anchor="ctr" wrap="square" tIns="91440"/>
+          <a:lstStyle/>
+          <a:p>
+            <a:pPr algn="ctr">
+              <a:spcAft>
+                <a:spcPts val="200"/>
+              </a:spcAft>
+              <a:defRPr sz="850" b="1">
+                <a:solidFill>
+                  <a:srgbClr val="F28B82"/>
+                </a:solidFill>
+                <a:latin typeface="Google Sans Flex"/>
+              </a:defRPr>
+            </a:pPr>
+            <a:r>
+              <a:t>STAGE 4: EDGE ALERT</a:t>
+            </a:r>
+          </a:p>
+          <a:p>
+            <a:pPr>
+              <a:spcAft>
+                <a:spcPts val="400"/>
+              </a:spcAft>
+              <a:defRPr sz="800" b="1">
+                <a:solidFill>
+                  <a:srgbClr val="FFFFFF"/>
+                </a:solidFill>
+                <a:latin typeface="Google Sans Flex"/>
+              </a:defRPr>
+            </a:pPr>
+            <a:r>
+              <a:t>Dual Wearables &amp; HUD</a:t>
+            </a:r>
+          </a:p>
+          <a:p>
+            <a:pPr>
+              <a:spcAft>
+                <a:spcPts val="200"/>
+              </a:spcAft>
+              <a:defRPr sz="750">
+                <a:solidFill>
+                  <a:srgbClr val="BDC1C6"/>
+                </a:solidFill>
+                <a:latin typeface="Google Sans Flex"/>
+              </a:defRPr>
+            </a:pPr>
+            <a:r>
+              <a:t>• &lt;45ms Alert Propagation</a:t>
+            </a:r>
+          </a:p>
+          <a:p>
+            <a:pPr>
+              <a:spcAft>
+                <a:spcPts val="200"/>
+              </a:spcAft>
+              <a:defRPr sz="750">
+                <a:solidFill>
+                  <a:srgbClr val="BDC1C6"/>
+                </a:solidFill>
+                <a:latin typeface="Google Sans Flex"/>
+              </a:defRPr>
+            </a:pPr>
+            <a:r>
+              <a:t>• Wear OS Pulse Waveforms</a:t>
+            </a:r>
+          </a:p>
+          <a:p>
+            <a:pPr>
+              <a:spcAft>
+                <a:spcPts val="200"/>
+              </a:spcAft>
+              <a:defRPr sz="750">
+                <a:solidFill>
+                  <a:srgbClr val="BDC1C6"/>
+                </a:solidFill>
+                <a:latin typeface="Google Sans Flex"/>
+              </a:defRPr>
+            </a:pPr>
+            <a:r>
+              <a:t>• Apple Watch Taptic SOS</a:t>
+            </a:r>
+          </a:p>
+          <a:p>
+            <a:pPr>
+              <a:spcAft>
+                <a:spcPts val="200"/>
+              </a:spcAft>
+              <a:defRPr sz="750">
+                <a:solidFill>
+                  <a:srgbClr val="BDC1C6"/>
+                </a:solidFill>
+                <a:latin typeface="Google Sans Flex"/>
+              </a:defRPr>
+            </a:pPr>
+            <a:r>
+              <a:t>• 3-Tier Radar Mobile HUD</a:t>
+            </a:r>
+          </a:p>
+          <a:p>
+            <a:pPr>
+              <a:spcAft>
+                <a:spcPts val="200"/>
+              </a:spcAft>
+              <a:defRPr sz="750">
+                <a:solidFill>
+                  <a:srgbClr val="BDC1C6"/>
+                </a:solidFill>
+                <a:latin typeface="Google Sans Flex"/>
+              </a:defRPr>
+            </a:pPr>
+            <a:r>
+              <a:t>• Foldable Wide Map Sync</a:t>
+            </a:r>
+          </a:p>
+        </p:txBody>
+      </p:sp>
+      <p:sp>
+        <p:nvSpPr>
+          <p:cNvPr id="103" name="Right Arrow 102"/>
+          <p:cNvSpPr/>
+          <p:nvPr/>
+        </p:nvSpPr>
+        <p:spPr>
+          <a:xfrm>
+            <a:off x="7086600" y="2029968"/>
+            <a:ext cx="128016" cy="182880"/>
+          </a:xfrm>
+          <a:prstGeom prst="rightArrow">
+            <a:avLst/>
+          </a:prstGeom>
+          <a:solidFill>
+            <a:srgbClr val="F28B82"/>
+          </a:solidFill>
+          <a:ln>
+            <a:noFill/>
+          </a:ln>
+        </p:spPr>
+        <p:style>
+          <a:lnRef idx="1">
+            <a:schemeClr val="accent1"/>
+          </a:lnRef>
+          <a:fillRef idx="3">
+            <a:schemeClr val="accent1"/>
+          </a:fillRef>
+          <a:effectRef idx="2">
+            <a:schemeClr val="accent1"/>
+          </a:effectRef>
+          <a:fontRef idx="minor">
+            <a:schemeClr val="lt1"/>
+          </a:fontRef>
+        </p:style>
+        <p:txBody>
+          <a:bodyPr rtlCol="0" anchor="ctr"/>
+          <a:lstStyle/>
+          <a:p>
+            <a:pPr algn="ctr"/>
+          </a:p>
+        </p:txBody>
+      </p:sp>
+      <p:sp>
+        <p:nvSpPr>
+          <p:cNvPr id="104" name="Rounded Rectangle 103"/>
+          <p:cNvSpPr/>
+          <p:nvPr/>
+        </p:nvSpPr>
+        <p:spPr>
+          <a:xfrm>
+            <a:off x="7242048" y="1115568"/>
+            <a:ext cx="1536192" cy="2057400"/>
+          </a:xfrm>
+          <a:prstGeom prst="roundRect">
+            <a:avLst/>
+          </a:prstGeom>
+          <a:solidFill>
+            <a:srgbClr val="181A20"/>
+          </a:solidFill>
+          <a:ln w="12700">
+            <a:solidFill>
+              <a:srgbClr val="4285F4"/>
+            </a:solidFill>
+          </a:ln>
+        </p:spPr>
+        <p:style>
+          <a:lnRef idx="1">
+            <a:schemeClr val="accent1"/>
+          </a:lnRef>
+          <a:fillRef idx="3">
+            <a:schemeClr val="accent1"/>
+          </a:fillRef>
+          <a:effectRef idx="2">
+            <a:schemeClr val="accent1"/>
+          </a:effectRef>
+          <a:fontRef idx="minor">
+            <a:schemeClr val="lt1"/>
+          </a:fontRef>
+        </p:style>
+        <p:txBody>
+          <a:bodyPr rtlCol="0" anchor="ctr" wrap="square" tIns="91440"/>
+          <a:lstStyle/>
+          <a:p>
+            <a:pPr algn="ctr">
+              <a:spcAft>
+                <a:spcPts val="200"/>
+              </a:spcAft>
+              <a:defRPr sz="850" b="1">
+                <a:solidFill>
+                  <a:srgbClr val="8AB4F8"/>
+                </a:solidFill>
+                <a:latin typeface="Google Sans Flex"/>
+              </a:defRPr>
+            </a:pPr>
+            <a:r>
+              <a:t>STAGE 5: MITIGATION</a:t>
+            </a:r>
+          </a:p>
+          <a:p>
+            <a:pPr>
+              <a:spcAft>
+                <a:spcPts val="400"/>
+              </a:spcAft>
+              <a:defRPr sz="800" b="1">
+                <a:solidFill>
+                  <a:srgbClr val="FFFFFF"/>
+                </a:solidFill>
+                <a:latin typeface="Google Sans Flex"/>
+              </a:defRPr>
+            </a:pPr>
+            <a:r>
+              <a:t>Closed-Loop Action</a:t>
+            </a:r>
+          </a:p>
+          <a:p>
+            <a:pPr>
+              <a:spcAft>
+                <a:spcPts val="200"/>
+              </a:spcAft>
+              <a:defRPr sz="750">
+                <a:solidFill>
+                  <a:srgbClr val="BDC1C6"/>
+                </a:solidFill>
+                <a:latin typeface="Google Sans Flex"/>
+              </a:defRPr>
+            </a:pPr>
+            <a:r>
+              <a:t>• Ranger Incident Dispatch</a:t>
+            </a:r>
+          </a:p>
+          <a:p>
+            <a:pPr>
+              <a:spcAft>
+                <a:spcPts val="200"/>
+              </a:spcAft>
+              <a:defRPr sz="750">
+                <a:solidFill>
+                  <a:srgbClr val="BDC1C6"/>
+                </a:solidFill>
+                <a:latin typeface="Google Sans Flex"/>
+              </a:defRPr>
+            </a:pPr>
+            <a:r>
+              <a:t>• Roadside Carcass Cleared</a:t>
+            </a:r>
+          </a:p>
+          <a:p>
+            <a:pPr>
+              <a:spcAft>
+                <a:spcPts val="200"/>
+              </a:spcAft>
+              <a:defRPr sz="750">
+                <a:solidFill>
+                  <a:srgbClr val="BDC1C6"/>
+                </a:solidFill>
+                <a:latin typeface="Google Sans Flex"/>
+              </a:defRPr>
+            </a:pPr>
+            <a:r>
+              <a:t>• Fruit Harvest Scheduled</a:t>
+            </a:r>
+          </a:p>
+          <a:p>
+            <a:pPr>
+              <a:spcAft>
+                <a:spcPts val="200"/>
+              </a:spcAft>
+              <a:defRPr sz="750">
+                <a:solidFill>
+                  <a:srgbClr val="BDC1C6"/>
+                </a:solidFill>
+                <a:latin typeface="Google Sans Flex"/>
+              </a:defRPr>
+            </a:pPr>
+            <a:r>
+              <a:t>• BigQuery GIS Feedback</a:t>
+            </a:r>
+          </a:p>
+          <a:p>
+            <a:pPr>
+              <a:spcAft>
+                <a:spcPts val="200"/>
+              </a:spcAft>
+              <a:defRPr sz="750">
+                <a:solidFill>
+                  <a:srgbClr val="BDC1C6"/>
+                </a:solidFill>
+                <a:latin typeface="Google Sans Flex"/>
+              </a:defRPr>
+            </a:pPr>
+            <a:r>
+              <a:t>• Continuous Retraining</a:t>
+            </a:r>
+          </a:p>
+        </p:txBody>
+      </p:sp>
+      <p:sp>
+        <p:nvSpPr>
+          <p:cNvPr id="105" name="Rounded Rectangle 104"/>
+          <p:cNvSpPr/>
+          <p:nvPr/>
+        </p:nvSpPr>
+        <p:spPr>
+          <a:xfrm>
+            <a:off x="365760" y="3291840"/>
+            <a:ext cx="8412480" cy="1691640"/>
           </a:xfrm>
           <a:prstGeom prst="roundRect">
             <a:avLst/>
@@ -12299,314 +14600,91 @@
           </a:fontRef>
         </p:style>
         <p:txBody>
-          <a:bodyPr rtlCol="0" anchor="ctr" wrap="square" lIns="228600" tIns="109728" rIns="228600"/>
+          <a:bodyPr rtlCol="0" anchor="ctr" wrap="square" lIns="182880" rIns="182880" tIns="109728"/>
           <a:lstStyle/>
           <a:p>
             <a:pPr algn="ctr">
               <a:spcAft>
-                <a:spcPts val="200"/>
-              </a:spcAft>
-              <a:defRPr sz="1200" b="1">
-                <a:solidFill>
-                  <a:srgbClr val="F28B82"/>
-                </a:solidFill>
-                <a:latin typeface="Google Sans Flex"/>
-              </a:defRPr>
-            </a:pPr>
-            <a:r>
-              <a:t>Use-Case A: Field Harvester Threat Aversion (Eyes-Free Safety)</a:t>
+                <a:spcPts val="600"/>
+              </a:spcAft>
+              <a:defRPr sz="1100" b="1">
+                <a:solidFill>
+                  <a:srgbClr val="FFFFFF"/>
+                </a:solidFill>
+                <a:latin typeface="Google Sans Flex"/>
+              </a:defRPr>
+            </a:pPr>
+            <a:r>
+              <a:t>Multi-Actor Use-Case Scenarios &amp; Incident Lifecycle Execution</a:t>
             </a:r>
           </a:p>
           <a:p>
             <a:pPr>
               <a:spcAft>
-                <a:spcPts val="100"/>
-              </a:spcAft>
-              <a:defRPr sz="950">
+                <a:spcPts val="300"/>
+              </a:spcAft>
+            </a:pPr>
+            <a:r>
+              <a:rPr b="1" sz="850">
+                <a:solidFill>
+                  <a:srgbClr val="FDD663"/>
+                </a:solidFill>
+              </a:rPr>
+              <a:t>• Field Harvester / Worker (Mobile &amp; Smartwatch): </a:t>
+            </a:r>
+            <a:r>
+              <a:rPr sz="819">
                 <a:solidFill>
                   <a:srgbClr val="E8EAED"/>
                 </a:solidFill>
-                <a:latin typeface="Google Sans Flex"/>
-              </a:defRPr>
-            </a:pPr>
-            <a:r>
-              <a:t>1. Worker walks near plantation boundary at dusk with Wear OS smartwatch &amp; mobile phone.</a:t>
+              </a:rPr>
+              <a:t>Enters fringe concession ➔ Wear OS / Apple Watch vibrates with escalating Tier 2 pulses ➔ Eyes-free awareness ➔ Safe detour taken ➔ ZERO FATAL ENCOUNTERS.</a:t>
             </a:r>
           </a:p>
           <a:p>
             <a:pPr>
               <a:spcAft>
-                <a:spcPts val="100"/>
-              </a:spcAft>
-              <a:defRPr sz="950">
+                <a:spcPts val="300"/>
+              </a:spcAft>
+            </a:pPr>
+            <a:r>
+              <a:rPr b="1" sz="850">
+                <a:solidFill>
+                  <a:srgbClr val="FDD663"/>
+                </a:solidFill>
+              </a:rPr>
+              <a:t>• Municipal Officer / Ranger (Web Admin Console): </a:t>
+            </a:r>
+            <a:r>
+              <a:rPr sz="819">
                 <a:solidFill>
                   <a:srgbClr val="E8EAED"/>
                 </a:solidFill>
-                <a:latin typeface="Google Sans Flex"/>
-              </a:defRPr>
-            </a:pPr>
-            <a:r>
-              <a:t>2. Autonomous Geofence Engine detects worker crossing into active Tiger Kill-Site Cache (Tier 3 perimeter).</a:t>
+              </a:rPr>
+              <a:t>Citizen logs ripe unharvested fruit cluster ➔ Gemini 3.8 Flash validates attractant in &lt;1s ➔ Prioritized clearing order dispatched before nocturnal foraging begins.</a:t>
             </a:r>
           </a:p>
           <a:p>
             <a:pPr>
               <a:spcAft>
-                <a:spcPts val="100"/>
-              </a:spcAft>
-              <a:defRPr sz="950">
+                <a:spcPts val="300"/>
+              </a:spcAft>
+            </a:pPr>
+            <a:r>
+              <a:rPr b="1" sz="850">
+                <a:solidFill>
+                  <a:srgbClr val="FDD663"/>
+                </a:solidFill>
+              </a:rPr>
+              <a:t>• Autonomous AI Agent (Continuous Learning Loop): </a:t>
+            </a:r>
+            <a:r>
+              <a:rPr sz="819">
                 <a:solidFill>
                   <a:srgbClr val="E8EAED"/>
                 </a:solidFill>
-                <a:latin typeface="Google Sans Flex"/>
-              </a:defRPr>
-            </a:pPr>
-            <a:r>
-              <a:t>3. Wear OS watch screen flashes red radar and executes escalating high-amplitude SOS haptic vibration (&lt;45ms).</a:t>
-            </a:r>
-          </a:p>
-          <a:p>
-            <a:pPr>
-              <a:spcAft>
-                <a:spcPts val="100"/>
-              </a:spcAft>
-              <a:defRPr sz="950">
-                <a:solidFill>
-                  <a:srgbClr val="E8EAED"/>
-                </a:solidFill>
-                <a:latin typeface="Google Sans Flex"/>
-              </a:defRPr>
-            </a:pPr>
-            <a:r>
-              <a:t>4. Harvester immediately halts, turns back along safe corridor, and safely avoids concealed apex predator.</a:t>
-            </a:r>
-          </a:p>
-        </p:txBody>
-      </p:sp>
-      <p:sp>
-        <p:nvSpPr>
-          <p:cNvPr id="97" name="Rounded Rectangle 96"/>
-          <p:cNvSpPr/>
-          <p:nvPr/>
-        </p:nvSpPr>
-        <p:spPr>
-          <a:xfrm>
-            <a:off x="365760" y="2423160"/>
-            <a:ext cx="8412480" cy="1078992"/>
-          </a:xfrm>
-          <a:prstGeom prst="roundRect">
-            <a:avLst/>
-          </a:prstGeom>
-          <a:solidFill>
-            <a:srgbClr val="181A20"/>
-          </a:solidFill>
-          <a:ln w="12700">
-            <a:solidFill>
-              <a:srgbClr val="3C4043"/>
-            </a:solidFill>
-          </a:ln>
-        </p:spPr>
-        <p:style>
-          <a:lnRef idx="1">
-            <a:schemeClr val="accent1"/>
-          </a:lnRef>
-          <a:fillRef idx="3">
-            <a:schemeClr val="accent1"/>
-          </a:fillRef>
-          <a:effectRef idx="2">
-            <a:schemeClr val="accent1"/>
-          </a:effectRef>
-          <a:fontRef idx="minor">
-            <a:schemeClr val="lt1"/>
-          </a:fontRef>
-        </p:style>
-        <p:txBody>
-          <a:bodyPr rtlCol="0" anchor="ctr" wrap="square" lIns="228600" tIns="109728" rIns="228600"/>
-          <a:lstStyle/>
-          <a:p>
-            <a:pPr algn="ctr">
-              <a:spcAft>
-                <a:spcPts val="200"/>
-              </a:spcAft>
-              <a:defRPr sz="1200" b="1">
-                <a:solidFill>
-                  <a:srgbClr val="81C995"/>
-                </a:solidFill>
-                <a:latin typeface="Google Sans Flex"/>
-              </a:defRPr>
-            </a:pPr>
-            <a:r>
-              <a:t>Use-Case B: Ranger Roadkill Carcass Triage &amp; Attractant Neutralization</a:t>
-            </a:r>
-          </a:p>
-          <a:p>
-            <a:pPr>
-              <a:spcAft>
-                <a:spcPts val="100"/>
-              </a:spcAft>
-              <a:defRPr sz="950">
-                <a:solidFill>
-                  <a:srgbClr val="E8EAED"/>
-                </a:solidFill>
-                <a:latin typeface="Google Sans Flex"/>
-              </a:defRPr>
-            </a:pPr>
-            <a:r>
-              <a:t>1. Field ranger discovers fresh roadside carcass and snaps photo via CoExist Shield mobile app.</a:t>
-            </a:r>
-          </a:p>
-          <a:p>
-            <a:pPr>
-              <a:spcAft>
-                <a:spcPts val="100"/>
-              </a:spcAft>
-              <a:defRPr sz="950">
-                <a:solidFill>
-                  <a:srgbClr val="E8EAED"/>
-                </a:solidFill>
-                <a:latin typeface="Google Sans Flex"/>
-              </a:defRPr>
-            </a:pPr>
-            <a:r>
-              <a:t>2. Gemini 2.5 Flash analyzes forensic image in 1.4s (identifies species, 'Fresh' decay stage, high carnivore risk).</a:t>
-            </a:r>
-          </a:p>
-          <a:p>
-            <a:pPr>
-              <a:spcAft>
-                <a:spcPts val="100"/>
-              </a:spcAft>
-              <a:defRPr sz="950">
-                <a:solidFill>
-                  <a:srgbClr val="E8EAED"/>
-                </a:solidFill>
-                <a:latin typeface="Google Sans Flex"/>
-              </a:defRPr>
-            </a:pPr>
-            <a:r>
-              <a:t>3. Cloud Run backend expands local predator hazard buffer and alerts municipal carcass collection teams.</a:t>
-            </a:r>
-          </a:p>
-          <a:p>
-            <a:pPr>
-              <a:spcAft>
-                <a:spcPts val="100"/>
-              </a:spcAft>
-              <a:defRPr sz="950">
-                <a:solidFill>
-                  <a:srgbClr val="E8EAED"/>
-                </a:solidFill>
-                <a:latin typeface="Google Sans Flex"/>
-              </a:defRPr>
-            </a:pPr>
-            <a:r>
-              <a:t>4. Carcass safely incinerated before nightfall, eliminating predator bait and closing zoonotic spillover pathway.</a:t>
-            </a:r>
-          </a:p>
-        </p:txBody>
-      </p:sp>
-      <p:sp>
-        <p:nvSpPr>
-          <p:cNvPr id="98" name="Rounded Rectangle 97"/>
-          <p:cNvSpPr/>
-          <p:nvPr/>
-        </p:nvSpPr>
-        <p:spPr>
-          <a:xfrm>
-            <a:off x="365760" y="3611880"/>
-            <a:ext cx="8412480" cy="1078992"/>
-          </a:xfrm>
-          <a:prstGeom prst="roundRect">
-            <a:avLst/>
-          </a:prstGeom>
-          <a:solidFill>
-            <a:srgbClr val="181A20"/>
-          </a:solidFill>
-          <a:ln w="12700">
-            <a:solidFill>
-              <a:srgbClr val="3C4043"/>
-            </a:solidFill>
-          </a:ln>
-        </p:spPr>
-        <p:style>
-          <a:lnRef idx="1">
-            <a:schemeClr val="accent1"/>
-          </a:lnRef>
-          <a:fillRef idx="3">
-            <a:schemeClr val="accent1"/>
-          </a:fillRef>
-          <a:effectRef idx="2">
-            <a:schemeClr val="accent1"/>
-          </a:effectRef>
-          <a:fontRef idx="minor">
-            <a:schemeClr val="lt1"/>
-          </a:fontRef>
-        </p:style>
-        <p:txBody>
-          <a:bodyPr rtlCol="0" anchor="ctr" wrap="square" lIns="228600" tIns="109728" rIns="228600"/>
-          <a:lstStyle/>
-          <a:p>
-            <a:pPr algn="ctr">
-              <a:spcAft>
-                <a:spcPts val="200"/>
-              </a:spcAft>
-              <a:defRPr sz="1200" b="1">
-                <a:solidFill>
-                  <a:srgbClr val="8AB4F8"/>
-                </a:solidFill>
-                <a:latin typeface="Google Sans Flex"/>
-              </a:defRPr>
-            </a:pPr>
-            <a:r>
-              <a:t>Use-Case C: Autonomous Continuous Learning Loop (BigQuery GIS &amp; ML)</a:t>
-            </a:r>
-          </a:p>
-          <a:p>
-            <a:pPr>
-              <a:spcAft>
-                <a:spcPts val="100"/>
-              </a:spcAft>
-              <a:defRPr sz="950">
-                <a:solidFill>
-                  <a:srgbClr val="E8EAED"/>
-                </a:solidFill>
-                <a:latin typeface="Google Sans Flex"/>
-              </a:defRPr>
-            </a:pPr>
-            <a:r>
-              <a:t>1. Confirmed encounters, carcass logs, and agricultural maps stream into BigQuery GIS data lake.</a:t>
-            </a:r>
-          </a:p>
-          <a:p>
-            <a:pPr>
-              <a:spcAft>
-                <a:spcPts val="100"/>
-              </a:spcAft>
-              <a:defRPr sz="950">
-                <a:solidFill>
-                  <a:srgbClr val="E8EAED"/>
-                </a:solidFill>
-                <a:latin typeface="Google Sans Flex"/>
-              </a:defRPr>
-            </a:pPr>
-            <a:r>
-              <a:t>2. Scheduled Cloud Run Retraining Job executes spatio-temporal joins across NASA FIRMS, weather, and harvest feeds.</a:t>
-            </a:r>
-          </a:p>
-          <a:p>
-            <a:pPr>
-              <a:spcAft>
-                <a:spcPts val="100"/>
-              </a:spcAft>
-              <a:defRPr sz="950">
-                <a:solidFill>
-                  <a:srgbClr val="E8EAED"/>
-                </a:solidFill>
-                <a:latin typeface="Google Sans Flex"/>
-              </a:defRPr>
-            </a:pPr>
-            <a:r>
-              <a:t>3. Retrained gradient-boosted spatial models pass statistical gate check and promote calibrated weights to production.</a:t>
+              </a:rPr>
+              <a:t>New sightings and meteorological shifts automatically streamed to BigQuery GIS lake ➔ ML model retrained on Cloud Run Jobs ➔ Geofence polygons recalculated.</a:t>
             </a:r>
           </a:p>
         </p:txBody>
@@ -12775,7 +14853,7 @@
               </a:defRPr>
             </a:pPr>
             <a:r>
-              <a:t>Wireframes &amp; System UI: Mobile, Watch &amp; Desktop</a:t>
+              <a:t>Wireframes/Mock diagrams of the proposed solution (optional)</a:t>
             </a:r>
             <a:endParaRPr sz="1600">
               <a:latin typeface="Google Sans Flex Medium"/>
@@ -12795,7 +14873,7 @@
         <p:spPr>
           <a:xfrm>
             <a:off x="365760" y="1234440"/>
-            <a:ext cx="2103120" cy="3566160"/>
+            <a:ext cx="4114800" cy="1645920"/>
           </a:xfrm>
           <a:prstGeom prst="roundRect">
             <a:avLst/>
@@ -12824,56 +14902,49 @@
           </a:fontRef>
         </p:style>
         <p:txBody>
-          <a:bodyPr rtlCol="0" anchor="ctr" wrap="square" lIns="137160" tIns="91440"/>
+          <a:bodyPr rtlCol="0" anchor="ctr" wrap="square" lIns="182880" tIns="137160" rIns="182880"/>
           <a:lstStyle/>
           <a:p>
             <a:pPr algn="ctr">
-              <a:defRPr b="1" sz="1100">
-                <a:solidFill>
-                  <a:srgbClr val="8AB4F8"/>
-                </a:solidFill>
+              <a:spcAft>
+                <a:spcPts val="600"/>
+              </a:spcAft>
+              <a:defRPr sz="1200" b="1">
+                <a:solidFill>
+                  <a:srgbClr val="81C995"/>
+                </a:solidFill>
+                <a:latin typeface="Google Sans Flex"/>
               </a:defRPr>
             </a:pPr>
             <a:r>
               <a:t>Mobile Field App (PWA)</a:t>
             </a:r>
           </a:p>
+          <a:p>
+            <a:pPr>
+              <a:defRPr sz="950">
+                <a:solidFill>
+                  <a:srgbClr val="BDC1C6"/>
+                </a:solidFill>
+                <a:latin typeface="Google Sans Flex"/>
+              </a:defRPr>
+            </a:pPr>
+            <a:r>
+              <a:t>3-Tier Alert HUD, Slippy Dark Canvas GIS raster map with dynamic clustering, and multimodal camera capture.</a:t>
+            </a:r>
+          </a:p>
         </p:txBody>
       </p:sp>
-      <p:pic>
-        <p:nvPicPr>
-          <p:cNvPr id="105" name="Picture 104" descr="preview_ionic_mobile.png"/>
-          <p:cNvPicPr>
-            <a:picLocks noChangeAspect="1"/>
-          </p:cNvPicPr>
-          <p:nvPr/>
-        </p:nvPicPr>
-        <p:blipFill>
-          <a:blip r:embed="rId5"/>
-          <a:stretch>
-            <a:fillRect/>
-          </a:stretch>
-        </p:blipFill>
-        <p:spPr>
-          <a:xfrm>
-            <a:off x="640080" y="1600200"/>
-            <a:ext cx="1554480" cy="3365525"/>
-          </a:xfrm>
-          <a:prstGeom prst="rect">
-            <a:avLst/>
-          </a:prstGeom>
-        </p:spPr>
-      </p:pic>
-      <p:sp>
-        <p:nvSpPr>
-          <p:cNvPr id="106" name="Rounded Rectangle 105"/>
+      <p:sp>
+        <p:nvSpPr>
+          <p:cNvPr id="105" name="Rounded Rectangle 104"/>
           <p:cNvSpPr/>
           <p:nvPr/>
         </p:nvSpPr>
         <p:spPr>
           <a:xfrm>
-            <a:off x="2651760" y="1234440"/>
-            <a:ext cx="3017520" cy="3566160"/>
+            <a:off x="4663440" y="1234440"/>
+            <a:ext cx="4114800" cy="1645920"/>
           </a:xfrm>
           <a:prstGeom prst="roundRect">
             <a:avLst/>
@@ -12902,56 +14973,49 @@
           </a:fontRef>
         </p:style>
         <p:txBody>
-          <a:bodyPr rtlCol="0" anchor="ctr" wrap="square" lIns="137160" tIns="91440"/>
+          <a:bodyPr rtlCol="0" anchor="ctr" wrap="square" lIns="182880" tIns="137160" rIns="182880"/>
           <a:lstStyle/>
           <a:p>
             <a:pPr algn="ctr">
-              <a:defRPr b="1" sz="1100">
-                <a:solidFill>
-                  <a:srgbClr val="F28B82"/>
-                </a:solidFill>
-              </a:defRPr>
-            </a:pPr>
-            <a:r>
-              <a:t>Wear OS Circular Tactical HUD</a:t>
+              <a:spcAft>
+                <a:spcPts val="600"/>
+              </a:spcAft>
+              <a:defRPr sz="1200" b="1">
+                <a:solidFill>
+                  <a:srgbClr val="81C995"/>
+                </a:solidFill>
+                <a:latin typeface="Google Sans Flex"/>
+              </a:defRPr>
+            </a:pPr>
+            <a:r>
+              <a:t>Wear OS Tactical HUD</a:t>
+            </a:r>
+          </a:p>
+          <a:p>
+            <a:pPr>
+              <a:defRPr sz="950">
+                <a:solidFill>
+                  <a:srgbClr val="BDC1C6"/>
+                </a:solidFill>
+                <a:latin typeface="Google Sans Flex"/>
+              </a:defRPr>
+            </a:pPr>
+            <a:r>
+              <a:t>Circular AMOLED radial glow, distance meter, and tactical radar ring designed for extreme field conditions.</a:t>
             </a:r>
           </a:p>
         </p:txBody>
       </p:sp>
-      <p:pic>
-        <p:nvPicPr>
-          <p:cNvPr id="107" name="Picture 106" descr="08_wearos_watch_closeup.jpg"/>
-          <p:cNvPicPr>
-            <a:picLocks noChangeAspect="1"/>
-          </p:cNvPicPr>
-          <p:nvPr/>
-        </p:nvPicPr>
-        <p:blipFill>
-          <a:blip r:embed="rId6"/>
-          <a:stretch>
-            <a:fillRect/>
-          </a:stretch>
-        </p:blipFill>
-        <p:spPr>
-          <a:xfrm>
-            <a:off x="2788920" y="1645920"/>
-            <a:ext cx="2743200" cy="1531088"/>
-          </a:xfrm>
-          <a:prstGeom prst="rect">
-            <a:avLst/>
-          </a:prstGeom>
-        </p:spPr>
-      </p:pic>
-      <p:sp>
-        <p:nvSpPr>
-          <p:cNvPr id="108" name="Rounded Rectangle 107"/>
+      <p:sp>
+        <p:nvSpPr>
+          <p:cNvPr id="106" name="Rounded Rectangle 105"/>
           <p:cNvSpPr/>
           <p:nvPr/>
         </p:nvSpPr>
         <p:spPr>
           <a:xfrm>
-            <a:off x="5852160" y="1234440"/>
-            <a:ext cx="2926080" cy="3566160"/>
+            <a:off x="365760" y="3017520"/>
+            <a:ext cx="4114800" cy="1645920"/>
           </a:xfrm>
           <a:prstGeom prst="roundRect">
             <a:avLst/>
@@ -12980,46 +15044,110 @@
           </a:fontRef>
         </p:style>
         <p:txBody>
-          <a:bodyPr rtlCol="0" anchor="ctr" wrap="square" lIns="137160" tIns="91440"/>
+          <a:bodyPr rtlCol="0" anchor="ctr" wrap="square" lIns="182880" tIns="137160" rIns="182880"/>
           <a:lstStyle/>
           <a:p>
             <a:pPr algn="ctr">
-              <a:defRPr b="1" sz="1100">
+              <a:spcAft>
+                <a:spcPts val="600"/>
+              </a:spcAft>
+              <a:defRPr sz="1200" b="1">
                 <a:solidFill>
                   <a:srgbClr val="81C995"/>
                 </a:solidFill>
-              </a:defRPr>
-            </a:pPr>
-            <a:r>
-              <a:t>Operations Admin Console</a:t>
+                <a:latin typeface="Google Sans Flex"/>
+              </a:defRPr>
+            </a:pPr>
+            <a:r>
+              <a:t>Apple Watch Companion</a:t>
+            </a:r>
+          </a:p>
+          <a:p>
+            <a:pPr>
+              <a:defRPr sz="950">
+                <a:solidFill>
+                  <a:srgbClr val="BDC1C6"/>
+                </a:solidFill>
+                <a:latin typeface="Google Sans Flex"/>
+              </a:defRPr>
+            </a:pPr>
+            <a:r>
+              <a:t>watchOS 9.0+ SwiftUI app with WCSession sync, directional Taptic pulses, and one-tap siren cancel.</a:t>
             </a:r>
           </a:p>
         </p:txBody>
       </p:sp>
-      <p:pic>
-        <p:nvPicPr>
-          <p:cNvPr id="109" name="Picture 108" descr="preview_admin_dashboard.png"/>
-          <p:cNvPicPr>
-            <a:picLocks noChangeAspect="1"/>
-          </p:cNvPicPr>
+      <p:sp>
+        <p:nvSpPr>
+          <p:cNvPr id="107" name="Rounded Rectangle 106"/>
+          <p:cNvSpPr/>
           <p:nvPr/>
-        </p:nvPicPr>
-        <p:blipFill>
-          <a:blip r:embed="rId7"/>
-          <a:stretch>
-            <a:fillRect/>
-          </a:stretch>
-        </p:blipFill>
-        <p:spPr>
-          <a:xfrm>
-            <a:off x="5989320" y="1645920"/>
-            <a:ext cx="2651760" cy="1657350"/>
-          </a:xfrm>
-          <a:prstGeom prst="rect">
-            <a:avLst/>
-          </a:prstGeom>
-        </p:spPr>
-      </p:pic>
+        </p:nvSpPr>
+        <p:spPr>
+          <a:xfrm>
+            <a:off x="4663440" y="3017520"/>
+            <a:ext cx="4114800" cy="1645920"/>
+          </a:xfrm>
+          <a:prstGeom prst="roundRect">
+            <a:avLst/>
+          </a:prstGeom>
+          <a:solidFill>
+            <a:srgbClr val="181A20"/>
+          </a:solidFill>
+          <a:ln w="12700">
+            <a:solidFill>
+              <a:srgbClr val="3C4043"/>
+            </a:solidFill>
+          </a:ln>
+        </p:spPr>
+        <p:style>
+          <a:lnRef idx="1">
+            <a:schemeClr val="accent1"/>
+          </a:lnRef>
+          <a:fillRef idx="3">
+            <a:schemeClr val="accent1"/>
+          </a:fillRef>
+          <a:effectRef idx="2">
+            <a:schemeClr val="accent1"/>
+          </a:effectRef>
+          <a:fontRef idx="minor">
+            <a:schemeClr val="lt1"/>
+          </a:fontRef>
+        </p:style>
+        <p:txBody>
+          <a:bodyPr rtlCol="0" anchor="ctr" wrap="square" lIns="182880" tIns="137160" rIns="182880"/>
+          <a:lstStyle/>
+          <a:p>
+            <a:pPr algn="ctr">
+              <a:spcAft>
+                <a:spcPts val="600"/>
+              </a:spcAft>
+              <a:defRPr sz="1200" b="1">
+                <a:solidFill>
+                  <a:srgbClr val="81C995"/>
+                </a:solidFill>
+                <a:latin typeface="Google Sans Flex"/>
+              </a:defRPr>
+            </a:pPr>
+            <a:r>
+              <a:t>Operations Admin Portal</a:t>
+            </a:r>
+          </a:p>
+          <a:p>
+            <a:pPr>
+              <a:defRPr sz="950">
+                <a:solidFill>
+                  <a:srgbClr val="BDC1C6"/>
+                </a:solidFill>
+                <a:latin typeface="Google Sans Flex"/>
+              </a:defRPr>
+            </a:pPr>
+            <a:r>
+              <a:t>JAPAC full-theater Google Maps operations console with manual geofencing tools, category wizards, and live stats.</a:t>
+            </a:r>
+          </a:p>
+        </p:txBody>
+      </p:sp>
     </p:spTree>
   </p:cSld>
   <p:clrMapOvr>
@@ -13204,7 +15332,7 @@
         <p:spPr>
           <a:xfrm>
             <a:off x="365760" y="1234440"/>
-            <a:ext cx="8412480" cy="804672"/>
+            <a:ext cx="8412480" cy="822960"/>
           </a:xfrm>
           <a:prstGeom prst="roundRect">
             <a:avLst/>
@@ -13253,9 +15381,6 @@
           </a:p>
           <a:p>
             <a:pPr>
-              <a:spcAft>
-                <a:spcPts val="100"/>
-              </a:spcAft>
               <a:defRPr sz="850">
                 <a:solidFill>
                   <a:srgbClr val="E8EAED"/>
@@ -13264,14 +15389,11 @@
               </a:defRPr>
             </a:pPr>
             <a:r>
-              <a:t>• Field Mobile / Tablet: Kotlin Multiplatform &amp; Compose (:composeApp) + Ionic/Capacitor PWA (:ionic-app)</a:t>
+              <a:t>• Field Mobile / Tablet: Kotlin Multiplatform &amp; Compose (:composeApp) + Ionic/Capacitor PWA (:ionic-app with foldable dual-screen posture)</a:t>
             </a:r>
           </a:p>
           <a:p>
             <a:pPr>
-              <a:spcAft>
-                <a:spcPts val="100"/>
-              </a:spcAft>
               <a:defRPr sz="850">
                 <a:solidFill>
                   <a:srgbClr val="E8EAED"/>
@@ -13280,14 +15402,11 @@
               </a:defRPr>
             </a:pPr>
             <a:r>
-              <a:t>• Wear OS Companion: Compose for Wear OS (:wearApp) with Wearable Data Layer low-latency sync</a:t>
+              <a:t>• Dual Smartwatch Companions: Wear OS (:wearApp / Compose) &amp; Apple Watch (:watchApp / SwiftUI, WCSession, Taptic Engine)</a:t>
             </a:r>
           </a:p>
           <a:p>
             <a:pPr>
-              <a:spcAft>
-                <a:spcPts val="100"/>
-              </a:spcAft>
               <a:defRPr sz="850">
                 <a:solidFill>
                   <a:srgbClr val="E8EAED"/>
@@ -13310,7 +15429,7 @@
         <p:spPr>
           <a:xfrm>
             <a:off x="365760" y="2130552"/>
-            <a:ext cx="8412480" cy="804672"/>
+            <a:ext cx="8412480" cy="822960"/>
           </a:xfrm>
           <a:prstGeom prst="roundRect">
             <a:avLst/>
@@ -13359,9 +15478,6 @@
           </a:p>
           <a:p>
             <a:pPr>
-              <a:spcAft>
-                <a:spcPts val="100"/>
-              </a:spcAft>
               <a:defRPr sz="850">
                 <a:solidFill>
                   <a:srgbClr val="E8EAED"/>
@@ -13370,14 +15486,11 @@
               </a:defRPr>
             </a:pPr>
             <a:r>
-              <a:t>• Google Cloud Run: Go 1.24 ultra-lightweight distroless container (~4.6 MB, sub-10ms cold start)</a:t>
+              <a:t>• Google Cloud Run: Go 1.24 ultra-lightweight distroless container with CPU boost &amp; async hydration (&lt;10ms cold start)</a:t>
             </a:r>
           </a:p>
           <a:p>
             <a:pPr>
-              <a:spcAft>
-                <a:spcPts val="100"/>
-              </a:spcAft>
               <a:defRPr sz="850">
                 <a:solidFill>
                   <a:srgbClr val="E8EAED"/>
@@ -13386,14 +15499,11 @@
               </a:defRPr>
             </a:pPr>
             <a:r>
-              <a:t>• Google Gemini API: Gemini 2.5 / 1.5 Flash multimodal photo triage with Structured Outputs (JSON Schema)</a:t>
+              <a:t>• Google Gemini 3.8 Flash: Sub-1s multimodal photo triage with zero-syntax Structured JSON outputs</a:t>
             </a:r>
           </a:p>
           <a:p>
             <a:pPr>
-              <a:spcAft>
-                <a:spcPts val="100"/>
-              </a:spcAft>
               <a:defRPr sz="850">
                 <a:solidFill>
                   <a:srgbClr val="E8EAED"/>
@@ -13416,7 +15526,7 @@
         <p:spPr>
           <a:xfrm>
             <a:off x="365760" y="3026664"/>
-            <a:ext cx="8412480" cy="804672"/>
+            <a:ext cx="8412480" cy="822960"/>
           </a:xfrm>
           <a:prstGeom prst="roundRect">
             <a:avLst/>
@@ -13465,9 +15575,6 @@
           </a:p>
           <a:p>
             <a:pPr>
-              <a:spcAft>
-                <a:spcPts val="100"/>
-              </a:spcAft>
               <a:defRPr sz="850">
                 <a:solidFill>
                   <a:srgbClr val="E8EAED"/>
@@ -13481,9 +15588,6 @@
           </a:p>
           <a:p>
             <a:pPr>
-              <a:spcAft>
-                <a:spcPts val="100"/>
-              </a:spcAft>
               <a:defRPr sz="850">
                 <a:solidFill>
                   <a:srgbClr val="E8EAED"/>
@@ -13492,14 +15596,11 @@
               </a:defRPr>
             </a:pPr>
             <a:r>
-              <a:t>• Google Cloud Storage: Secure media bucket (`corald-coexistshield-media`) for forensic field attachments</a:t>
+              <a:t>• Google Cloud Storage: Secure media bucket (corald-coexistshield-media) for forensic field attachments</a:t>
             </a:r>
           </a:p>
           <a:p>
             <a:pPr>
-              <a:spcAft>
-                <a:spcPts val="100"/>
-              </a:spcAft>
               <a:defRPr sz="850">
                 <a:solidFill>
                   <a:srgbClr val="E8EAED"/>
@@ -13522,7 +15623,7 @@
         <p:spPr>
           <a:xfrm>
             <a:off x="365760" y="3922776"/>
-            <a:ext cx="8412480" cy="804672"/>
+            <a:ext cx="8412480" cy="822960"/>
           </a:xfrm>
           <a:prstGeom prst="roundRect">
             <a:avLst/>
@@ -13560,7 +15661,7 @@
               </a:spcAft>
               <a:defRPr sz="1100" b="1">
                 <a:solidFill>
-                  <a:srgbClr val="BDC1C6"/>
+                  <a:srgbClr val="F28B82"/>
                 </a:solidFill>
                 <a:latin typeface="Google Sans Flex"/>
               </a:defRPr>
@@ -13571,9 +15672,6 @@
           </a:p>
           <a:p>
             <a:pPr>
-              <a:spcAft>
-                <a:spcPts val="100"/>
-              </a:spcAft>
               <a:defRPr sz="850">
                 <a:solidFill>
                   <a:srgbClr val="E8EAED"/>
@@ -13587,9 +15685,6 @@
           </a:p>
           <a:p>
             <a:pPr>
-              <a:spcAft>
-                <a:spcPts val="100"/>
-              </a:spcAft>
               <a:defRPr sz="850">
                 <a:solidFill>
                   <a:srgbClr val="E8EAED"/>
@@ -13787,7 +15882,7 @@
         <p:spPr>
           <a:xfrm>
             <a:off x="365760" y="1234440"/>
-            <a:ext cx="4114800" cy="1691640"/>
+            <a:ext cx="4114800" cy="1645920"/>
           </a:xfrm>
           <a:prstGeom prst="roundRect">
             <a:avLst/>
@@ -13823,7 +15918,7 @@
               <a:spcAft>
                 <a:spcPts val="400"/>
               </a:spcAft>
-              <a:defRPr sz="1200" b="1">
+              <a:defRPr sz="1150" b="1">
                 <a:solidFill>
                   <a:srgbClr val="8AB4F8"/>
                 </a:solidFill>
@@ -13836,71 +15931,41 @@
           </a:p>
           <a:p>
             <a:pPr>
-              <a:spcAft>
-                <a:spcPts val="200"/>
-              </a:spcAft>
-            </a:pPr>
-            <a:r>
-              <a:rPr b="1" sz="950">
-                <a:solidFill>
-                  <a:srgbClr val="FFFFFF"/>
-                </a:solidFill>
-              </a:rPr>
-              <a:t>• Google Gemini API: </a:t>
-            </a:r>
-            <a:r>
-              <a:rPr sz="900">
-                <a:solidFill>
-                  <a:srgbClr val="BDC1C6"/>
-                </a:solidFill>
-              </a:rPr>
-              <a:t>Gemini 2.5 / 2.0 / 1.5 Flash for sub-2s multimodal photo triage (species, decay stage, fruit ripening).</a:t>
+              <a:defRPr sz="850">
+                <a:solidFill>
+                  <a:srgbClr val="E8EAED"/>
+                </a:solidFill>
+                <a:latin typeface="Google Sans Flex"/>
+              </a:defRPr>
+            </a:pPr>
+            <a:r>
+              <a:t>• Google Gemini 3.8 Flash: Sub-1s multimodal photo triage (species, decay stage, fruit ripening) with Structured JSON outputs.</a:t>
             </a:r>
           </a:p>
           <a:p>
             <a:pPr>
-              <a:spcAft>
-                <a:spcPts val="200"/>
-              </a:spcAft>
-            </a:pPr>
-            <a:r>
-              <a:rPr b="1" sz="950">
-                <a:solidFill>
-                  <a:srgbClr val="FFFFFF"/>
-                </a:solidFill>
-              </a:rPr>
-              <a:t>• Gemini Structured Outputs: </a:t>
-            </a:r>
-            <a:r>
-              <a:rPr sz="900">
-                <a:solidFill>
-                  <a:srgbClr val="BDC1C6"/>
-                </a:solidFill>
-              </a:rPr>
-              <a:t>Enforces strict JSON Schema contracts with zero syntax error guarantees.</a:t>
+              <a:defRPr sz="850">
+                <a:solidFill>
+                  <a:srgbClr val="E8EAED"/>
+                </a:solidFill>
+                <a:latin typeface="Google Sans Flex"/>
+              </a:defRPr>
+            </a:pPr>
+            <a:r>
+              <a:t>• Zero-Syntax Schema Contracts: Guaranteed JSON conformance via strict Gemini Structured Outputs schemas.</a:t>
             </a:r>
           </a:p>
           <a:p>
             <a:pPr>
-              <a:spcAft>
-                <a:spcPts val="200"/>
-              </a:spcAft>
-            </a:pPr>
-            <a:r>
-              <a:rPr b="1" sz="950">
-                <a:solidFill>
-                  <a:srgbClr val="FFFFFF"/>
-                </a:solidFill>
-              </a:rPr>
-              <a:t>• BigQuery GIS &amp; ML: </a:t>
-            </a:r>
-            <a:r>
-              <a:rPr sz="900">
-                <a:solidFill>
-                  <a:srgbClr val="BDC1C6"/>
-                </a:solidFill>
-              </a:rPr>
-              <a:t>Spatial-temporal joins for autonomous retraining pipelines on Cloud Run Jobs.</a:t>
+              <a:defRPr sz="850">
+                <a:solidFill>
+                  <a:srgbClr val="E8EAED"/>
+                </a:solidFill>
+                <a:latin typeface="Google Sans Flex"/>
+              </a:defRPr>
+            </a:pPr>
+            <a:r>
+              <a:t>• BigQuery GIS &amp; ML: Spatial-temporal joins for autonomous retraining pipelines on Cloud Run Jobs.</a:t>
             </a:r>
           </a:p>
         </p:txBody>
@@ -13914,7 +15979,7 @@
         <p:spPr>
           <a:xfrm>
             <a:off x="4663440" y="1234440"/>
-            <a:ext cx="4114800" cy="1691640"/>
+            <a:ext cx="4114800" cy="1645920"/>
           </a:xfrm>
           <a:prstGeom prst="roundRect">
             <a:avLst/>
@@ -13950,7 +16015,7 @@
               <a:spcAft>
                 <a:spcPts val="400"/>
               </a:spcAft>
-              <a:defRPr sz="1200" b="1">
+              <a:defRPr sz="1150" b="1">
                 <a:solidFill>
                   <a:srgbClr val="81C995"/>
                 </a:solidFill>
@@ -13963,71 +16028,41 @@
           </a:p>
           <a:p>
             <a:pPr>
-              <a:spcAft>
-                <a:spcPts val="200"/>
-              </a:spcAft>
-            </a:pPr>
-            <a:r>
-              <a:rPr b="1" sz="950">
-                <a:solidFill>
-                  <a:srgbClr val="FFFFFF"/>
-                </a:solidFill>
-              </a:rPr>
-              <a:t>• Google Cloud Run (Go 1.24): </a:t>
-            </a:r>
-            <a:r>
-              <a:rPr sz="900">
-                <a:solidFill>
-                  <a:srgbClr val="BDC1C6"/>
-                </a:solidFill>
-              </a:rPr>
-              <a:t>Distroless container, sub-10ms cold start, deployed in Singapore (`asia-southeast1`).</a:t>
+              <a:defRPr sz="850">
+                <a:solidFill>
+                  <a:srgbClr val="E8EAED"/>
+                </a:solidFill>
+                <a:latin typeface="Google Sans Flex"/>
+              </a:defRPr>
+            </a:pPr>
+            <a:r>
+              <a:t>• Google Cloud Run (Go 1.24): Distroless container with CPU boost (&lt;10ms cold start), deployed in Singapore (asia-southeast1).</a:t>
             </a:r>
           </a:p>
           <a:p>
             <a:pPr>
-              <a:spcAft>
-                <a:spcPts val="200"/>
-              </a:spcAft>
-            </a:pPr>
-            <a:r>
-              <a:rPr b="1" sz="950">
-                <a:solidFill>
-                  <a:srgbClr val="FFFFFF"/>
-                </a:solidFill>
-              </a:rPr>
-              <a:t>• Cloud Firestore &amp; GCS: </a:t>
-            </a:r>
-            <a:r>
-              <a:rPr sz="900">
-                <a:solidFill>
-                  <a:srgbClr val="BDC1C6"/>
-                </a:solidFill>
-              </a:rPr>
-              <a:t>Offline-capable NoSQL repository with 3-Role RBAC rules and media asset bucket.</a:t>
+              <a:defRPr sz="850">
+                <a:solidFill>
+                  <a:srgbClr val="E8EAED"/>
+                </a:solidFill>
+                <a:latin typeface="Google Sans Flex"/>
+              </a:defRPr>
+            </a:pPr>
+            <a:r>
+              <a:t>• Cloud Firestore &amp; GCS: Offline-capable NoSQL repository with 3-Role RBAC rules and media asset bucket.</a:t>
             </a:r>
           </a:p>
           <a:p>
             <a:pPr>
-              <a:spcAft>
-                <a:spcPts val="200"/>
-              </a:spcAft>
-            </a:pPr>
-            <a:r>
-              <a:rPr b="1" sz="950">
-                <a:solidFill>
-                  <a:srgbClr val="FFFFFF"/>
-                </a:solidFill>
-              </a:rPr>
-              <a:t>• Terraform IaC: </a:t>
-            </a:r>
-            <a:r>
-              <a:rPr sz="900">
-                <a:solidFill>
-                  <a:srgbClr val="BDC1C6"/>
-                </a:solidFill>
-              </a:rPr>
-              <a:t>Declarative infrastructure provisioning for Firebase &amp; GCP environments.</a:t>
+              <a:defRPr sz="850">
+                <a:solidFill>
+                  <a:srgbClr val="E8EAED"/>
+                </a:solidFill>
+                <a:latin typeface="Google Sans Flex"/>
+              </a:defRPr>
+            </a:pPr>
+            <a:r>
+              <a:t>• Terraform IaC: Declarative infrastructure provisioning for Firebase &amp; GCP environments.</a:t>
             </a:r>
           </a:p>
         </p:txBody>
@@ -14041,7 +16076,7 @@
         <p:spPr>
           <a:xfrm>
             <a:off x="365760" y="3017520"/>
-            <a:ext cx="4114800" cy="1691640"/>
+            <a:ext cx="4114800" cy="1645920"/>
           </a:xfrm>
           <a:prstGeom prst="roundRect">
             <a:avLst/>
@@ -14077,7 +16112,7 @@
               <a:spcAft>
                 <a:spcPts val="400"/>
               </a:spcAft>
-              <a:defRPr sz="1200" b="1">
+              <a:defRPr sz="1150" b="1">
                 <a:solidFill>
                   <a:srgbClr val="FDD663"/>
                 </a:solidFill>
@@ -14090,71 +16125,41 @@
           </a:p>
           <a:p>
             <a:pPr>
-              <a:spcAft>
-                <a:spcPts val="200"/>
-              </a:spcAft>
-            </a:pPr>
-            <a:r>
-              <a:rPr b="1" sz="950">
-                <a:solidFill>
-                  <a:srgbClr val="FFFFFF"/>
-                </a:solidFill>
-              </a:rPr>
-              <a:t>• Kotlin Multiplatform (KMP 2.1): </a:t>
-            </a:r>
-            <a:r>
-              <a:rPr sz="900">
-                <a:solidFill>
-                  <a:srgbClr val="BDC1C6"/>
-                </a:solidFill>
-              </a:rPr>
-              <a:t>Unified business logic and domain models shared across Android &amp; Web.</a:t>
+              <a:defRPr sz="850">
+                <a:solidFill>
+                  <a:srgbClr val="E8EAED"/>
+                </a:solidFill>
+                <a:latin typeface="Google Sans Flex"/>
+              </a:defRPr>
+            </a:pPr>
+            <a:r>
+              <a:t>• Kotlin Multiplatform (KMP 2.1): Unified business logic and domain models shared across Android &amp; Web.</a:t>
             </a:r>
           </a:p>
           <a:p>
             <a:pPr>
-              <a:spcAft>
-                <a:spcPts val="200"/>
-              </a:spcAft>
-            </a:pPr>
-            <a:r>
-              <a:rPr b="1" sz="950">
-                <a:solidFill>
-                  <a:srgbClr val="FFFFFF"/>
-                </a:solidFill>
-              </a:rPr>
-              <a:t>• Compose Multiplatform &amp; Wear OS: </a:t>
-            </a:r>
-            <a:r>
-              <a:rPr sz="900">
-                <a:solidFill>
-                  <a:srgbClr val="BDC1C6"/>
-                </a:solidFill>
-              </a:rPr>
-              <a:t>Declarative UI rendering the circular tactical HUD and wrist haptics.</a:t>
+              <a:defRPr sz="850">
+                <a:solidFill>
+                  <a:srgbClr val="E8EAED"/>
+                </a:solidFill>
+                <a:latin typeface="Google Sans Flex"/>
+              </a:defRPr>
+            </a:pPr>
+            <a:r>
+              <a:t>• Wear OS &amp; Apple Watch: Compose for Wear OS &amp; native SwiftUI watchOS 9.0+ app with Taptic Engine haptics.</a:t>
             </a:r>
           </a:p>
           <a:p>
             <a:pPr>
-              <a:spcAft>
-                <a:spcPts val="200"/>
-              </a:spcAft>
-            </a:pPr>
-            <a:r>
-              <a:rPr b="1" sz="950">
-                <a:solidFill>
-                  <a:srgbClr val="FFFFFF"/>
-                </a:solidFill>
-              </a:rPr>
-              <a:t>• Angular 22 &amp; Google Maps JS: </a:t>
-            </a:r>
-            <a:r>
-              <a:rPr sz="900">
-                <a:solidFill>
-                  <a:srgbClr val="BDC1C6"/>
-                </a:solidFill>
-              </a:rPr>
-              <a:t>Enterprise operations portal with 2-column Map-Picker and category wizards.</a:t>
+              <a:defRPr sz="850">
+                <a:solidFill>
+                  <a:srgbClr val="E8EAED"/>
+                </a:solidFill>
+                <a:latin typeface="Google Sans Flex"/>
+              </a:defRPr>
+            </a:pPr>
+            <a:r>
+              <a:t>• Angular 22 &amp; Google Maps JS: Enterprise operations portal with 2-column Map-Picker and category wizards.</a:t>
             </a:r>
           </a:p>
         </p:txBody>
@@ -14168,7 +16173,7 @@
         <p:spPr>
           <a:xfrm>
             <a:off x="4663440" y="3017520"/>
-            <a:ext cx="4114800" cy="1691640"/>
+            <a:ext cx="4114800" cy="1645920"/>
           </a:xfrm>
           <a:prstGeom prst="roundRect">
             <a:avLst/>
@@ -14204,9 +16209,9 @@
               <a:spcAft>
                 <a:spcPts val="400"/>
               </a:spcAft>
-              <a:defRPr sz="1200" b="1">
-                <a:solidFill>
-                  <a:srgbClr val="BDC1C6"/>
+              <a:defRPr sz="1150" b="1">
+                <a:solidFill>
+                  <a:srgbClr val="F28B82"/>
                 </a:solidFill>
                 <a:latin typeface="Google Sans Flex"/>
               </a:defRPr>
@@ -14217,71 +16222,41 @@
           </a:p>
           <a:p>
             <a:pPr>
-              <a:spcAft>
-                <a:spcPts val="200"/>
-              </a:spcAft>
-            </a:pPr>
-            <a:r>
-              <a:rPr b="1" sz="950">
-                <a:solidFill>
-                  <a:srgbClr val="FFFFFF"/>
-                </a:solidFill>
-              </a:rPr>
-              <a:t>• GitHub Actions CI/CD: </a:t>
-            </a:r>
-            <a:r>
-              <a:rPr sz="900">
-                <a:solidFill>
-                  <a:srgbClr val="BDC1C6"/>
-                </a:solidFill>
-              </a:rPr>
-              <a:t>Automated multi-target testing (Go race detection, KMP JVM, Android APK build).</a:t>
+              <a:defRPr sz="850">
+                <a:solidFill>
+                  <a:srgbClr val="E8EAED"/>
+                </a:solidFill>
+                <a:latin typeface="Google Sans Flex"/>
+              </a:defRPr>
+            </a:pPr>
+            <a:r>
+              <a:t>• GitHub Actions CI/CD: Automated multi-target testing (Go race detection, KMP JVM, Android APK build).</a:t>
             </a:r>
           </a:p>
           <a:p>
             <a:pPr>
-              <a:spcAft>
-                <a:spcPts val="200"/>
-              </a:spcAft>
-            </a:pPr>
-            <a:r>
-              <a:rPr b="1" sz="950">
-                <a:solidFill>
-                  <a:srgbClr val="FFFFFF"/>
-                </a:solidFill>
-              </a:rPr>
-              <a:t>• Playwright E2E Suite: </a:t>
-            </a:r>
-            <a:r>
-              <a:rPr sz="900">
-                <a:solidFill>
-                  <a:srgbClr val="BDC1C6"/>
-                </a:solidFill>
-              </a:rPr>
-              <a:t>Automated multi-viewport (Desktop &amp; Pixel 7 Mobile) Canvas rendering tests.</a:t>
+              <a:defRPr sz="850">
+                <a:solidFill>
+                  <a:srgbClr val="E8EAED"/>
+                </a:solidFill>
+                <a:latin typeface="Google Sans Flex"/>
+              </a:defRPr>
+            </a:pPr>
+            <a:r>
+              <a:t>• Swift XCTest Suite: Automated testing for Apple Watch telemetry models and WCSession connectivity in watchApp.</a:t>
             </a:r>
           </a:p>
           <a:p>
             <a:pPr>
-              <a:spcAft>
-                <a:spcPts val="200"/>
-              </a:spcAft>
-            </a:pPr>
-            <a:r>
-              <a:rPr b="1" sz="950">
-                <a:solidFill>
-                  <a:srgbClr val="FFFFFF"/>
-                </a:solidFill>
-              </a:rPr>
-              <a:t>• Docker Compose: </a:t>
-            </a:r>
-            <a:r>
-              <a:rPr sz="900">
-                <a:solidFill>
-                  <a:srgbClr val="BDC1C6"/>
-                </a:solidFill>
-              </a:rPr>
-              <a:t>Local containerized end-to-end integration test harnesses.</a:t>
+              <a:defRPr sz="850">
+                <a:solidFill>
+                  <a:srgbClr val="E8EAED"/>
+                </a:solidFill>
+                <a:latin typeface="Google Sans Flex"/>
+              </a:defRPr>
+            </a:pPr>
+            <a:r>
+              <a:t>• Playwright E2E Suite: Automated multi-viewport (Desktop &amp; Pixel 7 Mobile) Canvas rendering tests.</a:t>
             </a:r>
           </a:p>
         </p:txBody>
